--- a/Presentation/RL_Lecture.pptx
+++ b/Presentation/RL_Lecture.pptx
@@ -382,1109 +382,6 @@
           <a:lstStyle/>
           <a:p>
             <a:r>
-              <a:rPr lang="en-US" dirty="0"/>
-              <a:t>The VTA is </a:t>
-            </a:r>
-            <a:r>
-              <a:rPr lang="en-US" b="1" dirty="0"/>
-              <a:t>the dopamine production hub </a:t>
-            </a:r>
-            <a:r>
-              <a:rPr lang="en-US" dirty="0"/>
-              <a:t>of the brain. </a:t>
-            </a:r>
-          </a:p>
-        </p:txBody>
-      </p:sp>
-      <p:sp>
-        <p:nvSpPr>
-          <p:cNvPr id="4" name="Slide Number Placeholder 3"/>
-          <p:cNvSpPr>
-            <a:spLocks noGrp="1"/>
-          </p:cNvSpPr>
-          <p:nvPr>
-            <p:ph type="sldNum" sz="quarter" idx="10"/>
-          </p:nvPr>
-        </p:nvSpPr>
-        <p:spPr/>
-        <p:txBody>
-          <a:bodyPr/>
-          <a:lstStyle/>
-          <a:p>
-            <a:fld id="{F7021451-1387-4CA6-816F-3879F97B5CBC}" type="slidenum">
-              <a:rPr lang="en-US"/>
-              <a:t>12</a:t>
-            </a:fld>
-            <a:endParaRPr lang="en-US"/>
-          </a:p>
-        </p:txBody>
-      </p:sp>
-    </p:spTree>
-    <p:extLst>
-      <p:ext uri="{BB962C8B-B14F-4D97-AF65-F5344CB8AC3E}">
-        <p14:creationId xmlns:p14="http://schemas.microsoft.com/office/powerpoint/2010/main" val="1024086991"/>
-      </p:ext>
-    </p:extLst>
-  </p:cSld>
-  <p:clrMapOvr>
-    <a:masterClrMapping/>
-  </p:clrMapOvr>
-</p:notes>
-</file>
-
-<file path=ppt/notesSlides/notesSlide11.xml><?xml version="1.0" encoding="utf-8"?>
-<p:notes xmlns:a="http://schemas.openxmlformats.org/drawingml/2006/main" xmlns:r="http://schemas.openxmlformats.org/officeDocument/2006/relationships" xmlns:p="http://schemas.openxmlformats.org/presentationml/2006/main">
-  <p:cSld>
-    <p:spTree>
-      <p:nvGrpSpPr>
-        <p:cNvPr id="1" name=""/>
-        <p:cNvGrpSpPr/>
-        <p:nvPr/>
-      </p:nvGrpSpPr>
-      <p:grpSpPr>
-        <a:xfrm>
-          <a:off x="0" y="0"/>
-          <a:ext cx="0" cy="0"/>
-          <a:chOff x="0" y="0"/>
-          <a:chExt cx="0" cy="0"/>
-        </a:xfrm>
-      </p:grpSpPr>
-      <p:sp>
-        <p:nvSpPr>
-          <p:cNvPr id="2" name="Slide Image Placeholder 1"/>
-          <p:cNvSpPr>
-            <a:spLocks noGrp="1" noRot="1" noChangeAspect="1"/>
-          </p:cNvSpPr>
-          <p:nvPr>
-            <p:ph type="sldImg"/>
-          </p:nvPr>
-        </p:nvSpPr>
-        <p:spPr/>
-      </p:sp>
-      <p:sp>
-        <p:nvSpPr>
-          <p:cNvPr id="3" name="Notes Placeholder 2"/>
-          <p:cNvSpPr>
-            <a:spLocks noGrp="1"/>
-          </p:cNvSpPr>
-          <p:nvPr>
-            <p:ph type="body" idx="1"/>
-          </p:nvPr>
-        </p:nvSpPr>
-        <p:spPr/>
-        <p:txBody>
-          <a:bodyPr/>
-          <a:lstStyle/>
-          <a:p>
-            <a:endParaRPr lang="en-US" dirty="0"/>
-          </a:p>
-        </p:txBody>
-      </p:sp>
-      <p:sp>
-        <p:nvSpPr>
-          <p:cNvPr id="4" name="Slide Number Placeholder 3"/>
-          <p:cNvSpPr>
-            <a:spLocks noGrp="1"/>
-          </p:cNvSpPr>
-          <p:nvPr>
-            <p:ph type="sldNum" sz="quarter" idx="10"/>
-          </p:nvPr>
-        </p:nvSpPr>
-        <p:spPr/>
-        <p:txBody>
-          <a:bodyPr/>
-          <a:lstStyle/>
-          <a:p>
-            <a:fld id="{F7021451-1387-4CA6-816F-3879F97B5CBC}" type="slidenum">
-              <a:rPr lang="en-US"/>
-              <a:t>13</a:t>
-            </a:fld>
-            <a:endParaRPr lang="en-US"/>
-          </a:p>
-        </p:txBody>
-      </p:sp>
-    </p:spTree>
-    <p:extLst>
-      <p:ext uri="{BB962C8B-B14F-4D97-AF65-F5344CB8AC3E}">
-        <p14:creationId xmlns:p14="http://schemas.microsoft.com/office/powerpoint/2010/main" val="1024086991"/>
-      </p:ext>
-    </p:extLst>
-  </p:cSld>
-  <p:clrMapOvr>
-    <a:masterClrMapping/>
-  </p:clrMapOvr>
-</p:notes>
-</file>
-
-<file path=ppt/notesSlides/notesSlide12.xml><?xml version="1.0" encoding="utf-8"?>
-<p:notes xmlns:a="http://schemas.openxmlformats.org/drawingml/2006/main" xmlns:r="http://schemas.openxmlformats.org/officeDocument/2006/relationships" xmlns:p="http://schemas.openxmlformats.org/presentationml/2006/main">
-  <p:cSld>
-    <p:spTree>
-      <p:nvGrpSpPr>
-        <p:cNvPr id="1" name=""/>
-        <p:cNvGrpSpPr/>
-        <p:nvPr/>
-      </p:nvGrpSpPr>
-      <p:grpSpPr>
-        <a:xfrm>
-          <a:off x="0" y="0"/>
-          <a:ext cx="0" cy="0"/>
-          <a:chOff x="0" y="0"/>
-          <a:chExt cx="0" cy="0"/>
-        </a:xfrm>
-      </p:grpSpPr>
-      <p:sp>
-        <p:nvSpPr>
-          <p:cNvPr id="2" name="Slide Image Placeholder 1"/>
-          <p:cNvSpPr>
-            <a:spLocks noGrp="1" noRot="1" noChangeAspect="1"/>
-          </p:cNvSpPr>
-          <p:nvPr>
-            <p:ph type="sldImg"/>
-          </p:nvPr>
-        </p:nvSpPr>
-        <p:spPr/>
-      </p:sp>
-      <p:sp>
-        <p:nvSpPr>
-          <p:cNvPr id="3" name="Notes Placeholder 2"/>
-          <p:cNvSpPr>
-            <a:spLocks noGrp="1"/>
-          </p:cNvSpPr>
-          <p:nvPr>
-            <p:ph type="body" idx="1"/>
-          </p:nvPr>
-        </p:nvSpPr>
-        <p:spPr/>
-        <p:txBody>
-          <a:bodyPr/>
-          <a:lstStyle/>
-          <a:p>
-            <a:endParaRPr lang="en-US" dirty="0"/>
-          </a:p>
-        </p:txBody>
-      </p:sp>
-      <p:sp>
-        <p:nvSpPr>
-          <p:cNvPr id="4" name="Slide Number Placeholder 3"/>
-          <p:cNvSpPr>
-            <a:spLocks noGrp="1"/>
-          </p:cNvSpPr>
-          <p:nvPr>
-            <p:ph type="sldNum" sz="quarter" idx="10"/>
-          </p:nvPr>
-        </p:nvSpPr>
-        <p:spPr/>
-        <p:txBody>
-          <a:bodyPr/>
-          <a:lstStyle/>
-          <a:p>
-            <a:fld id="{F7021451-1387-4CA6-816F-3879F97B5CBC}" type="slidenum">
-              <a:rPr lang="en-US"/>
-              <a:t>14</a:t>
-            </a:fld>
-            <a:endParaRPr lang="en-US"/>
-          </a:p>
-        </p:txBody>
-      </p:sp>
-    </p:spTree>
-    <p:extLst>
-      <p:ext uri="{BB962C8B-B14F-4D97-AF65-F5344CB8AC3E}">
-        <p14:creationId xmlns:p14="http://schemas.microsoft.com/office/powerpoint/2010/main" val="1024086991"/>
-      </p:ext>
-    </p:extLst>
-  </p:cSld>
-  <p:clrMapOvr>
-    <a:masterClrMapping/>
-  </p:clrMapOvr>
-</p:notes>
-</file>
-
-<file path=ppt/notesSlides/notesSlide13.xml><?xml version="1.0" encoding="utf-8"?>
-<p:notes xmlns:a="http://schemas.openxmlformats.org/drawingml/2006/main" xmlns:r="http://schemas.openxmlformats.org/officeDocument/2006/relationships" xmlns:p="http://schemas.openxmlformats.org/presentationml/2006/main">
-  <p:cSld>
-    <p:spTree>
-      <p:nvGrpSpPr>
-        <p:cNvPr id="1" name=""/>
-        <p:cNvGrpSpPr/>
-        <p:nvPr/>
-      </p:nvGrpSpPr>
-      <p:grpSpPr>
-        <a:xfrm>
-          <a:off x="0" y="0"/>
-          <a:ext cx="0" cy="0"/>
-          <a:chOff x="0" y="0"/>
-          <a:chExt cx="0" cy="0"/>
-        </a:xfrm>
-      </p:grpSpPr>
-      <p:sp>
-        <p:nvSpPr>
-          <p:cNvPr id="2" name="Slide Image Placeholder 1"/>
-          <p:cNvSpPr>
-            <a:spLocks noGrp="1" noRot="1" noChangeAspect="1"/>
-          </p:cNvSpPr>
-          <p:nvPr>
-            <p:ph type="sldImg"/>
-          </p:nvPr>
-        </p:nvSpPr>
-        <p:spPr/>
-      </p:sp>
-      <p:sp>
-        <p:nvSpPr>
-          <p:cNvPr id="3" name="Notes Placeholder 2"/>
-          <p:cNvSpPr>
-            <a:spLocks noGrp="1"/>
-          </p:cNvSpPr>
-          <p:nvPr>
-            <p:ph type="body" idx="1"/>
-          </p:nvPr>
-        </p:nvSpPr>
-        <p:spPr/>
-        <p:txBody>
-          <a:bodyPr/>
-          <a:lstStyle/>
-          <a:p>
-            <a:endParaRPr lang="en-US" dirty="0"/>
-          </a:p>
-        </p:txBody>
-      </p:sp>
-      <p:sp>
-        <p:nvSpPr>
-          <p:cNvPr id="4" name="Slide Number Placeholder 3"/>
-          <p:cNvSpPr>
-            <a:spLocks noGrp="1"/>
-          </p:cNvSpPr>
-          <p:nvPr>
-            <p:ph type="sldNum" sz="quarter" idx="10"/>
-          </p:nvPr>
-        </p:nvSpPr>
-        <p:spPr/>
-        <p:txBody>
-          <a:bodyPr/>
-          <a:lstStyle/>
-          <a:p>
-            <a:fld id="{F7021451-1387-4CA6-816F-3879F97B5CBC}" type="slidenum">
-              <a:rPr lang="en-US"/>
-              <a:t>15</a:t>
-            </a:fld>
-            <a:endParaRPr lang="en-US"/>
-          </a:p>
-        </p:txBody>
-      </p:sp>
-    </p:spTree>
-    <p:extLst>
-      <p:ext uri="{BB962C8B-B14F-4D97-AF65-F5344CB8AC3E}">
-        <p14:creationId xmlns:p14="http://schemas.microsoft.com/office/powerpoint/2010/main" val="1024086991"/>
-      </p:ext>
-    </p:extLst>
-  </p:cSld>
-  <p:clrMapOvr>
-    <a:masterClrMapping/>
-  </p:clrMapOvr>
-</p:notes>
-</file>
-
-<file path=ppt/notesSlides/notesSlide14.xml><?xml version="1.0" encoding="utf-8"?>
-<p:notes xmlns:a="http://schemas.openxmlformats.org/drawingml/2006/main" xmlns:r="http://schemas.openxmlformats.org/officeDocument/2006/relationships" xmlns:p="http://schemas.openxmlformats.org/presentationml/2006/main">
-  <p:cSld>
-    <p:spTree>
-      <p:nvGrpSpPr>
-        <p:cNvPr id="1" name=""/>
-        <p:cNvGrpSpPr/>
-        <p:nvPr/>
-      </p:nvGrpSpPr>
-      <p:grpSpPr>
-        <a:xfrm>
-          <a:off x="0" y="0"/>
-          <a:ext cx="0" cy="0"/>
-          <a:chOff x="0" y="0"/>
-          <a:chExt cx="0" cy="0"/>
-        </a:xfrm>
-      </p:grpSpPr>
-      <p:sp>
-        <p:nvSpPr>
-          <p:cNvPr id="2" name="Slide Image Placeholder 1"/>
-          <p:cNvSpPr>
-            <a:spLocks noGrp="1" noRot="1" noChangeAspect="1"/>
-          </p:cNvSpPr>
-          <p:nvPr>
-            <p:ph type="sldImg"/>
-          </p:nvPr>
-        </p:nvSpPr>
-        <p:spPr/>
-      </p:sp>
-      <p:sp>
-        <p:nvSpPr>
-          <p:cNvPr id="3" name="Notes Placeholder 2"/>
-          <p:cNvSpPr>
-            <a:spLocks noGrp="1"/>
-          </p:cNvSpPr>
-          <p:nvPr>
-            <p:ph type="body" idx="1"/>
-          </p:nvPr>
-        </p:nvSpPr>
-        <p:spPr/>
-        <p:txBody>
-          <a:bodyPr/>
-          <a:lstStyle/>
-          <a:p>
-            <a:endParaRPr lang="en-US" dirty="0"/>
-          </a:p>
-        </p:txBody>
-      </p:sp>
-      <p:sp>
-        <p:nvSpPr>
-          <p:cNvPr id="4" name="Slide Number Placeholder 3"/>
-          <p:cNvSpPr>
-            <a:spLocks noGrp="1"/>
-          </p:cNvSpPr>
-          <p:nvPr>
-            <p:ph type="sldNum" sz="quarter" idx="10"/>
-          </p:nvPr>
-        </p:nvSpPr>
-        <p:spPr/>
-        <p:txBody>
-          <a:bodyPr/>
-          <a:lstStyle/>
-          <a:p>
-            <a:fld id="{F7021451-1387-4CA6-816F-3879F97B5CBC}" type="slidenum">
-              <a:rPr lang="en-US"/>
-              <a:t>16</a:t>
-            </a:fld>
-            <a:endParaRPr lang="en-US"/>
-          </a:p>
-        </p:txBody>
-      </p:sp>
-    </p:spTree>
-    <p:extLst>
-      <p:ext uri="{BB962C8B-B14F-4D97-AF65-F5344CB8AC3E}">
-        <p14:creationId xmlns:p14="http://schemas.microsoft.com/office/powerpoint/2010/main" val="1024086991"/>
-      </p:ext>
-    </p:extLst>
-  </p:cSld>
-  <p:clrMapOvr>
-    <a:masterClrMapping/>
-  </p:clrMapOvr>
-</p:notes>
-</file>
-
-<file path=ppt/notesSlides/notesSlide15.xml><?xml version="1.0" encoding="utf-8"?>
-<p:notes xmlns:a="http://schemas.openxmlformats.org/drawingml/2006/main" xmlns:r="http://schemas.openxmlformats.org/officeDocument/2006/relationships" xmlns:p="http://schemas.openxmlformats.org/presentationml/2006/main">
-  <p:cSld>
-    <p:spTree>
-      <p:nvGrpSpPr>
-        <p:cNvPr id="1" name=""/>
-        <p:cNvGrpSpPr/>
-        <p:nvPr/>
-      </p:nvGrpSpPr>
-      <p:grpSpPr>
-        <a:xfrm>
-          <a:off x="0" y="0"/>
-          <a:ext cx="0" cy="0"/>
-          <a:chOff x="0" y="0"/>
-          <a:chExt cx="0" cy="0"/>
-        </a:xfrm>
-      </p:grpSpPr>
-      <p:sp>
-        <p:nvSpPr>
-          <p:cNvPr id="2" name="Slide Image Placeholder 1"/>
-          <p:cNvSpPr>
-            <a:spLocks noGrp="1" noRot="1" noChangeAspect="1"/>
-          </p:cNvSpPr>
-          <p:nvPr>
-            <p:ph type="sldImg"/>
-          </p:nvPr>
-        </p:nvSpPr>
-        <p:spPr/>
-      </p:sp>
-      <p:sp>
-        <p:nvSpPr>
-          <p:cNvPr id="3" name="Notes Placeholder 2"/>
-          <p:cNvSpPr>
-            <a:spLocks noGrp="1"/>
-          </p:cNvSpPr>
-          <p:nvPr>
-            <p:ph type="body" idx="1"/>
-          </p:nvPr>
-        </p:nvSpPr>
-        <p:spPr/>
-        <p:txBody>
-          <a:bodyPr/>
-          <a:lstStyle/>
-          <a:p>
-            <a:endParaRPr lang="en-US" dirty="0"/>
-          </a:p>
-        </p:txBody>
-      </p:sp>
-      <p:sp>
-        <p:nvSpPr>
-          <p:cNvPr id="4" name="Slide Number Placeholder 3"/>
-          <p:cNvSpPr>
-            <a:spLocks noGrp="1"/>
-          </p:cNvSpPr>
-          <p:nvPr>
-            <p:ph type="sldNum" sz="quarter" idx="10"/>
-          </p:nvPr>
-        </p:nvSpPr>
-        <p:spPr/>
-        <p:txBody>
-          <a:bodyPr/>
-          <a:lstStyle/>
-          <a:p>
-            <a:fld id="{F7021451-1387-4CA6-816F-3879F97B5CBC}" type="slidenum">
-              <a:rPr lang="en-US"/>
-              <a:t>17</a:t>
-            </a:fld>
-            <a:endParaRPr lang="en-US"/>
-          </a:p>
-        </p:txBody>
-      </p:sp>
-    </p:spTree>
-    <p:extLst>
-      <p:ext uri="{BB962C8B-B14F-4D97-AF65-F5344CB8AC3E}">
-        <p14:creationId xmlns:p14="http://schemas.microsoft.com/office/powerpoint/2010/main" val="1024086991"/>
-      </p:ext>
-    </p:extLst>
-  </p:cSld>
-  <p:clrMapOvr>
-    <a:masterClrMapping/>
-  </p:clrMapOvr>
-</p:notes>
-</file>
-
-<file path=ppt/notesSlides/notesSlide2.xml><?xml version="1.0" encoding="utf-8"?>
-<p:notes xmlns:a="http://schemas.openxmlformats.org/drawingml/2006/main" xmlns:r="http://schemas.openxmlformats.org/officeDocument/2006/relationships" xmlns:p="http://schemas.openxmlformats.org/presentationml/2006/main">
-  <p:cSld>
-    <p:spTree>
-      <p:nvGrpSpPr>
-        <p:cNvPr id="1" name=""/>
-        <p:cNvGrpSpPr/>
-        <p:nvPr/>
-      </p:nvGrpSpPr>
-      <p:grpSpPr>
-        <a:xfrm>
-          <a:off x="0" y="0"/>
-          <a:ext cx="0" cy="0"/>
-          <a:chOff x="0" y="0"/>
-          <a:chExt cx="0" cy="0"/>
-        </a:xfrm>
-      </p:grpSpPr>
-      <p:sp>
-        <p:nvSpPr>
-          <p:cNvPr id="2" name="Slide Image Placeholder 1"/>
-          <p:cNvSpPr>
-            <a:spLocks noGrp="1" noRot="1" noChangeAspect="1"/>
-          </p:cNvSpPr>
-          <p:nvPr>
-            <p:ph type="sldImg"/>
-          </p:nvPr>
-        </p:nvSpPr>
-        <p:spPr/>
-      </p:sp>
-      <p:sp>
-        <p:nvSpPr>
-          <p:cNvPr id="3" name="Notes Placeholder 2"/>
-          <p:cNvSpPr>
-            <a:spLocks noGrp="1"/>
-          </p:cNvSpPr>
-          <p:nvPr>
-            <p:ph type="body" idx="1"/>
-          </p:nvPr>
-        </p:nvSpPr>
-        <p:spPr/>
-        <p:txBody>
-          <a:bodyPr/>
-          <a:lstStyle/>
-          <a:p>
-            <a:endParaRPr lang="en-US" dirty="0"/>
-          </a:p>
-        </p:txBody>
-      </p:sp>
-      <p:sp>
-        <p:nvSpPr>
-          <p:cNvPr id="4" name="Slide Number Placeholder 3"/>
-          <p:cNvSpPr>
-            <a:spLocks noGrp="1"/>
-          </p:cNvSpPr>
-          <p:nvPr>
-            <p:ph type="sldNum" sz="quarter" idx="10"/>
-          </p:nvPr>
-        </p:nvSpPr>
-        <p:spPr/>
-        <p:txBody>
-          <a:bodyPr/>
-          <a:lstStyle/>
-          <a:p>
-            <a:fld id="{F7021451-1387-4CA6-816F-3879F97B5CBC}" type="slidenum">
-              <a:rPr lang="en-US"/>
-              <a:t>2</a:t>
-            </a:fld>
-            <a:endParaRPr lang="en-US"/>
-          </a:p>
-        </p:txBody>
-      </p:sp>
-    </p:spTree>
-    <p:extLst>
-      <p:ext uri="{BB962C8B-B14F-4D97-AF65-F5344CB8AC3E}">
-        <p14:creationId xmlns:p14="http://schemas.microsoft.com/office/powerpoint/2010/main" val="1024086991"/>
-      </p:ext>
-    </p:extLst>
-  </p:cSld>
-  <p:clrMapOvr>
-    <a:masterClrMapping/>
-  </p:clrMapOvr>
-</p:notes>
-</file>
-
-<file path=ppt/notesSlides/notesSlide3.xml><?xml version="1.0" encoding="utf-8"?>
-<p:notes xmlns:a="http://schemas.openxmlformats.org/drawingml/2006/main" xmlns:r="http://schemas.openxmlformats.org/officeDocument/2006/relationships" xmlns:p="http://schemas.openxmlformats.org/presentationml/2006/main">
-  <p:cSld>
-    <p:spTree>
-      <p:nvGrpSpPr>
-        <p:cNvPr id="1" name=""/>
-        <p:cNvGrpSpPr/>
-        <p:nvPr/>
-      </p:nvGrpSpPr>
-      <p:grpSpPr>
-        <a:xfrm>
-          <a:off x="0" y="0"/>
-          <a:ext cx="0" cy="0"/>
-          <a:chOff x="0" y="0"/>
-          <a:chExt cx="0" cy="0"/>
-        </a:xfrm>
-      </p:grpSpPr>
-      <p:sp>
-        <p:nvSpPr>
-          <p:cNvPr id="2" name="Slide Image Placeholder 1"/>
-          <p:cNvSpPr>
-            <a:spLocks noGrp="1" noRot="1" noChangeAspect="1"/>
-          </p:cNvSpPr>
-          <p:nvPr>
-            <p:ph type="sldImg"/>
-          </p:nvPr>
-        </p:nvSpPr>
-        <p:spPr/>
-      </p:sp>
-      <p:sp>
-        <p:nvSpPr>
-          <p:cNvPr id="3" name="Notes Placeholder 2"/>
-          <p:cNvSpPr>
-            <a:spLocks noGrp="1"/>
-          </p:cNvSpPr>
-          <p:nvPr>
-            <p:ph type="body" idx="1"/>
-          </p:nvPr>
-        </p:nvSpPr>
-        <p:spPr/>
-        <p:txBody>
-          <a:bodyPr/>
-          <a:lstStyle/>
-          <a:p>
-            <a:endParaRPr lang="en-US" dirty="0"/>
-          </a:p>
-        </p:txBody>
-      </p:sp>
-      <p:sp>
-        <p:nvSpPr>
-          <p:cNvPr id="4" name="Slide Number Placeholder 3"/>
-          <p:cNvSpPr>
-            <a:spLocks noGrp="1"/>
-          </p:cNvSpPr>
-          <p:nvPr>
-            <p:ph type="sldNum" sz="quarter" idx="10"/>
-          </p:nvPr>
-        </p:nvSpPr>
-        <p:spPr/>
-        <p:txBody>
-          <a:bodyPr/>
-          <a:lstStyle/>
-          <a:p>
-            <a:fld id="{F7021451-1387-4CA6-816F-3879F97B5CBC}" type="slidenum">
-              <a:rPr lang="en-US"/>
-              <a:t>3</a:t>
-            </a:fld>
-            <a:endParaRPr lang="en-US"/>
-          </a:p>
-        </p:txBody>
-      </p:sp>
-    </p:spTree>
-    <p:extLst>
-      <p:ext uri="{BB962C8B-B14F-4D97-AF65-F5344CB8AC3E}">
-        <p14:creationId xmlns:p14="http://schemas.microsoft.com/office/powerpoint/2010/main" val="1024086991"/>
-      </p:ext>
-    </p:extLst>
-  </p:cSld>
-  <p:clrMapOvr>
-    <a:masterClrMapping/>
-  </p:clrMapOvr>
-</p:notes>
-</file>
-
-<file path=ppt/notesSlides/notesSlide4.xml><?xml version="1.0" encoding="utf-8"?>
-<p:notes xmlns:a="http://schemas.openxmlformats.org/drawingml/2006/main" xmlns:r="http://schemas.openxmlformats.org/officeDocument/2006/relationships" xmlns:p="http://schemas.openxmlformats.org/presentationml/2006/main">
-  <p:cSld>
-    <p:spTree>
-      <p:nvGrpSpPr>
-        <p:cNvPr id="1" name=""/>
-        <p:cNvGrpSpPr/>
-        <p:nvPr/>
-      </p:nvGrpSpPr>
-      <p:grpSpPr>
-        <a:xfrm>
-          <a:off x="0" y="0"/>
-          <a:ext cx="0" cy="0"/>
-          <a:chOff x="0" y="0"/>
-          <a:chExt cx="0" cy="0"/>
-        </a:xfrm>
-      </p:grpSpPr>
-      <p:sp>
-        <p:nvSpPr>
-          <p:cNvPr id="2" name="Slide Image Placeholder 1"/>
-          <p:cNvSpPr>
-            <a:spLocks noGrp="1" noRot="1" noChangeAspect="1"/>
-          </p:cNvSpPr>
-          <p:nvPr>
-            <p:ph type="sldImg"/>
-          </p:nvPr>
-        </p:nvSpPr>
-        <p:spPr/>
-      </p:sp>
-      <p:sp>
-        <p:nvSpPr>
-          <p:cNvPr id="3" name="Notes Placeholder 2"/>
-          <p:cNvSpPr>
-            <a:spLocks noGrp="1"/>
-          </p:cNvSpPr>
-          <p:nvPr>
-            <p:ph type="body" idx="1"/>
-          </p:nvPr>
-        </p:nvSpPr>
-        <p:spPr/>
-        <p:txBody>
-          <a:bodyPr/>
-          <a:lstStyle/>
-          <a:p>
-            <a:endParaRPr lang="en-US" dirty="0"/>
-          </a:p>
-        </p:txBody>
-      </p:sp>
-      <p:sp>
-        <p:nvSpPr>
-          <p:cNvPr id="4" name="Slide Number Placeholder 3"/>
-          <p:cNvSpPr>
-            <a:spLocks noGrp="1"/>
-          </p:cNvSpPr>
-          <p:nvPr>
-            <p:ph type="sldNum" sz="quarter" idx="10"/>
-          </p:nvPr>
-        </p:nvSpPr>
-        <p:spPr/>
-        <p:txBody>
-          <a:bodyPr/>
-          <a:lstStyle/>
-          <a:p>
-            <a:fld id="{F7021451-1387-4CA6-816F-3879F97B5CBC}" type="slidenum">
-              <a:rPr lang="en-US"/>
-              <a:t>6</a:t>
-            </a:fld>
-            <a:endParaRPr lang="en-US"/>
-          </a:p>
-        </p:txBody>
-      </p:sp>
-    </p:spTree>
-    <p:extLst>
-      <p:ext uri="{BB962C8B-B14F-4D97-AF65-F5344CB8AC3E}">
-        <p14:creationId xmlns:p14="http://schemas.microsoft.com/office/powerpoint/2010/main" val="1024086991"/>
-      </p:ext>
-    </p:extLst>
-  </p:cSld>
-  <p:clrMapOvr>
-    <a:masterClrMapping/>
-  </p:clrMapOvr>
-</p:notes>
-</file>
-
-<file path=ppt/notesSlides/notesSlide5.xml><?xml version="1.0" encoding="utf-8"?>
-<p:notes xmlns:a="http://schemas.openxmlformats.org/drawingml/2006/main" xmlns:r="http://schemas.openxmlformats.org/officeDocument/2006/relationships" xmlns:p="http://schemas.openxmlformats.org/presentationml/2006/main">
-  <p:cSld>
-    <p:spTree>
-      <p:nvGrpSpPr>
-        <p:cNvPr id="1" name=""/>
-        <p:cNvGrpSpPr/>
-        <p:nvPr/>
-      </p:nvGrpSpPr>
-      <p:grpSpPr>
-        <a:xfrm>
-          <a:off x="0" y="0"/>
-          <a:ext cx="0" cy="0"/>
-          <a:chOff x="0" y="0"/>
-          <a:chExt cx="0" cy="0"/>
-        </a:xfrm>
-      </p:grpSpPr>
-      <p:sp>
-        <p:nvSpPr>
-          <p:cNvPr id="2" name="Slide Image Placeholder 1"/>
-          <p:cNvSpPr>
-            <a:spLocks noGrp="1" noRot="1" noChangeAspect="1"/>
-          </p:cNvSpPr>
-          <p:nvPr>
-            <p:ph type="sldImg"/>
-          </p:nvPr>
-        </p:nvSpPr>
-        <p:spPr/>
-      </p:sp>
-      <p:sp>
-        <p:nvSpPr>
-          <p:cNvPr id="3" name="Notes Placeholder 2"/>
-          <p:cNvSpPr>
-            <a:spLocks noGrp="1"/>
-          </p:cNvSpPr>
-          <p:nvPr>
-            <p:ph type="body" idx="1"/>
-          </p:nvPr>
-        </p:nvSpPr>
-        <p:spPr/>
-        <p:txBody>
-          <a:bodyPr/>
-          <a:lstStyle/>
-          <a:p>
-            <a:endParaRPr lang="en-US" dirty="0"/>
-          </a:p>
-        </p:txBody>
-      </p:sp>
-      <p:sp>
-        <p:nvSpPr>
-          <p:cNvPr id="4" name="Slide Number Placeholder 3"/>
-          <p:cNvSpPr>
-            <a:spLocks noGrp="1"/>
-          </p:cNvSpPr>
-          <p:nvPr>
-            <p:ph type="sldNum" sz="quarter" idx="10"/>
-          </p:nvPr>
-        </p:nvSpPr>
-        <p:spPr/>
-        <p:txBody>
-          <a:bodyPr/>
-          <a:lstStyle/>
-          <a:p>
-            <a:fld id="{F7021451-1387-4CA6-816F-3879F97B5CBC}" type="slidenum">
-              <a:rPr lang="en-US"/>
-              <a:t>7</a:t>
-            </a:fld>
-            <a:endParaRPr lang="en-US"/>
-          </a:p>
-        </p:txBody>
-      </p:sp>
-    </p:spTree>
-    <p:extLst>
-      <p:ext uri="{BB962C8B-B14F-4D97-AF65-F5344CB8AC3E}">
-        <p14:creationId xmlns:p14="http://schemas.microsoft.com/office/powerpoint/2010/main" val="1024086991"/>
-      </p:ext>
-    </p:extLst>
-  </p:cSld>
-  <p:clrMapOvr>
-    <a:masterClrMapping/>
-  </p:clrMapOvr>
-</p:notes>
-</file>
-
-<file path=ppt/notesSlides/notesSlide6.xml><?xml version="1.0" encoding="utf-8"?>
-<p:notes xmlns:a="http://schemas.openxmlformats.org/drawingml/2006/main" xmlns:r="http://schemas.openxmlformats.org/officeDocument/2006/relationships" xmlns:p="http://schemas.openxmlformats.org/presentationml/2006/main">
-  <p:cSld>
-    <p:spTree>
-      <p:nvGrpSpPr>
-        <p:cNvPr id="1" name=""/>
-        <p:cNvGrpSpPr/>
-        <p:nvPr/>
-      </p:nvGrpSpPr>
-      <p:grpSpPr>
-        <a:xfrm>
-          <a:off x="0" y="0"/>
-          <a:ext cx="0" cy="0"/>
-          <a:chOff x="0" y="0"/>
-          <a:chExt cx="0" cy="0"/>
-        </a:xfrm>
-      </p:grpSpPr>
-      <p:sp>
-        <p:nvSpPr>
-          <p:cNvPr id="2" name="Slide Image Placeholder 1"/>
-          <p:cNvSpPr>
-            <a:spLocks noGrp="1" noRot="1" noChangeAspect="1"/>
-          </p:cNvSpPr>
-          <p:nvPr>
-            <p:ph type="sldImg"/>
-          </p:nvPr>
-        </p:nvSpPr>
-        <p:spPr/>
-      </p:sp>
-      <p:sp>
-        <p:nvSpPr>
-          <p:cNvPr id="3" name="Notes Placeholder 2"/>
-          <p:cNvSpPr>
-            <a:spLocks noGrp="1"/>
-          </p:cNvSpPr>
-          <p:nvPr>
-            <p:ph type="body" idx="1"/>
-          </p:nvPr>
-        </p:nvSpPr>
-        <p:spPr/>
-        <p:txBody>
-          <a:bodyPr/>
-          <a:lstStyle/>
-          <a:p>
-            <a:endParaRPr lang="en-US" dirty="0"/>
-          </a:p>
-        </p:txBody>
-      </p:sp>
-      <p:sp>
-        <p:nvSpPr>
-          <p:cNvPr id="4" name="Slide Number Placeholder 3"/>
-          <p:cNvSpPr>
-            <a:spLocks noGrp="1"/>
-          </p:cNvSpPr>
-          <p:nvPr>
-            <p:ph type="sldNum" sz="quarter" idx="10"/>
-          </p:nvPr>
-        </p:nvSpPr>
-        <p:spPr/>
-        <p:txBody>
-          <a:bodyPr/>
-          <a:lstStyle/>
-          <a:p>
-            <a:fld id="{F7021451-1387-4CA6-816F-3879F97B5CBC}" type="slidenum">
-              <a:rPr lang="en-US"/>
-              <a:t>8</a:t>
-            </a:fld>
-            <a:endParaRPr lang="en-US"/>
-          </a:p>
-        </p:txBody>
-      </p:sp>
-    </p:spTree>
-    <p:extLst>
-      <p:ext uri="{BB962C8B-B14F-4D97-AF65-F5344CB8AC3E}">
-        <p14:creationId xmlns:p14="http://schemas.microsoft.com/office/powerpoint/2010/main" val="1024086991"/>
-      </p:ext>
-    </p:extLst>
-  </p:cSld>
-  <p:clrMapOvr>
-    <a:masterClrMapping/>
-  </p:clrMapOvr>
-</p:notes>
-</file>
-
-<file path=ppt/notesSlides/notesSlide7.xml><?xml version="1.0" encoding="utf-8"?>
-<p:notes xmlns:a="http://schemas.openxmlformats.org/drawingml/2006/main" xmlns:r="http://schemas.openxmlformats.org/officeDocument/2006/relationships" xmlns:p="http://schemas.openxmlformats.org/presentationml/2006/main">
-  <p:cSld>
-    <p:spTree>
-      <p:nvGrpSpPr>
-        <p:cNvPr id="1" name=""/>
-        <p:cNvGrpSpPr/>
-        <p:nvPr/>
-      </p:nvGrpSpPr>
-      <p:grpSpPr>
-        <a:xfrm>
-          <a:off x="0" y="0"/>
-          <a:ext cx="0" cy="0"/>
-          <a:chOff x="0" y="0"/>
-          <a:chExt cx="0" cy="0"/>
-        </a:xfrm>
-      </p:grpSpPr>
-      <p:sp>
-        <p:nvSpPr>
-          <p:cNvPr id="2" name="Slide Image Placeholder 1"/>
-          <p:cNvSpPr>
-            <a:spLocks noGrp="1" noRot="1" noChangeAspect="1"/>
-          </p:cNvSpPr>
-          <p:nvPr>
-            <p:ph type="sldImg"/>
-          </p:nvPr>
-        </p:nvSpPr>
-        <p:spPr/>
-      </p:sp>
-      <p:sp>
-        <p:nvSpPr>
-          <p:cNvPr id="3" name="Notes Placeholder 2"/>
-          <p:cNvSpPr>
-            <a:spLocks noGrp="1"/>
-          </p:cNvSpPr>
-          <p:nvPr>
-            <p:ph type="body" idx="1"/>
-          </p:nvPr>
-        </p:nvSpPr>
-        <p:spPr/>
-        <p:txBody>
-          <a:bodyPr/>
-          <a:lstStyle/>
-          <a:p>
-            <a:endParaRPr lang="en-US" dirty="0"/>
-          </a:p>
-        </p:txBody>
-      </p:sp>
-      <p:sp>
-        <p:nvSpPr>
-          <p:cNvPr id="4" name="Slide Number Placeholder 3"/>
-          <p:cNvSpPr>
-            <a:spLocks noGrp="1"/>
-          </p:cNvSpPr>
-          <p:nvPr>
-            <p:ph type="sldNum" sz="quarter" idx="10"/>
-          </p:nvPr>
-        </p:nvSpPr>
-        <p:spPr/>
-        <p:txBody>
-          <a:bodyPr/>
-          <a:lstStyle/>
-          <a:p>
-            <a:fld id="{F7021451-1387-4CA6-816F-3879F97B5CBC}" type="slidenum">
-              <a:rPr lang="en-US"/>
-              <a:t>9</a:t>
-            </a:fld>
-            <a:endParaRPr lang="en-US"/>
-          </a:p>
-        </p:txBody>
-      </p:sp>
-    </p:spTree>
-    <p:extLst>
-      <p:ext uri="{BB962C8B-B14F-4D97-AF65-F5344CB8AC3E}">
-        <p14:creationId xmlns:p14="http://schemas.microsoft.com/office/powerpoint/2010/main" val="1024086991"/>
-      </p:ext>
-    </p:extLst>
-  </p:cSld>
-  <p:clrMapOvr>
-    <a:masterClrMapping/>
-  </p:clrMapOvr>
-</p:notes>
-</file>
-
-<file path=ppt/notesSlides/notesSlide8.xml><?xml version="1.0" encoding="utf-8"?>
-<p:notes xmlns:a="http://schemas.openxmlformats.org/drawingml/2006/main" xmlns:r="http://schemas.openxmlformats.org/officeDocument/2006/relationships" xmlns:p="http://schemas.openxmlformats.org/presentationml/2006/main">
-  <p:cSld>
-    <p:spTree>
-      <p:nvGrpSpPr>
-        <p:cNvPr id="1" name=""/>
-        <p:cNvGrpSpPr/>
-        <p:nvPr/>
-      </p:nvGrpSpPr>
-      <p:grpSpPr>
-        <a:xfrm>
-          <a:off x="0" y="0"/>
-          <a:ext cx="0" cy="0"/>
-          <a:chOff x="0" y="0"/>
-          <a:chExt cx="0" cy="0"/>
-        </a:xfrm>
-      </p:grpSpPr>
-      <p:sp>
-        <p:nvSpPr>
-          <p:cNvPr id="2" name="Slide Image Placeholder 1"/>
-          <p:cNvSpPr>
-            <a:spLocks noGrp="1" noRot="1" noChangeAspect="1"/>
-          </p:cNvSpPr>
-          <p:nvPr>
-            <p:ph type="sldImg"/>
-          </p:nvPr>
-        </p:nvSpPr>
-        <p:spPr/>
-      </p:sp>
-      <p:sp>
-        <p:nvSpPr>
-          <p:cNvPr id="3" name="Notes Placeholder 2"/>
-          <p:cNvSpPr>
-            <a:spLocks noGrp="1"/>
-          </p:cNvSpPr>
-          <p:nvPr>
-            <p:ph type="body" idx="1"/>
-          </p:nvPr>
-        </p:nvSpPr>
-        <p:spPr/>
-        <p:txBody>
-          <a:bodyPr/>
-          <a:lstStyle/>
-          <a:p>
-            <a:endParaRPr lang="en-US" dirty="0"/>
-          </a:p>
-        </p:txBody>
-      </p:sp>
-      <p:sp>
-        <p:nvSpPr>
-          <p:cNvPr id="4" name="Slide Number Placeholder 3"/>
-          <p:cNvSpPr>
-            <a:spLocks noGrp="1"/>
-          </p:cNvSpPr>
-          <p:nvPr>
-            <p:ph type="sldNum" sz="quarter" idx="10"/>
-          </p:nvPr>
-        </p:nvSpPr>
-        <p:spPr/>
-        <p:txBody>
-          <a:bodyPr/>
-          <a:lstStyle/>
-          <a:p>
-            <a:fld id="{F7021451-1387-4CA6-816F-3879F97B5CBC}" type="slidenum">
-              <a:rPr lang="en-US"/>
-              <a:t>10</a:t>
-            </a:fld>
-            <a:endParaRPr lang="en-US"/>
-          </a:p>
-        </p:txBody>
-      </p:sp>
-    </p:spTree>
-    <p:extLst>
-      <p:ext uri="{BB962C8B-B14F-4D97-AF65-F5344CB8AC3E}">
-        <p14:creationId xmlns:p14="http://schemas.microsoft.com/office/powerpoint/2010/main" val="1024086991"/>
-      </p:ext>
-    </p:extLst>
-  </p:cSld>
-  <p:clrMapOvr>
-    <a:masterClrMapping/>
-  </p:clrMapOvr>
-</p:notes>
-</file>
-
-<file path=ppt/notesSlides/notesSlide9.xml><?xml version="1.0" encoding="utf-8"?>
-<p:notes xmlns:a="http://schemas.openxmlformats.org/drawingml/2006/main" xmlns:r="http://schemas.openxmlformats.org/officeDocument/2006/relationships" xmlns:p="http://schemas.openxmlformats.org/presentationml/2006/main">
-  <p:cSld>
-    <p:spTree>
-      <p:nvGrpSpPr>
-        <p:cNvPr id="1" name=""/>
-        <p:cNvGrpSpPr/>
-        <p:nvPr/>
-      </p:nvGrpSpPr>
-      <p:grpSpPr>
-        <a:xfrm>
-          <a:off x="0" y="0"/>
-          <a:ext cx="0" cy="0"/>
-          <a:chOff x="0" y="0"/>
-          <a:chExt cx="0" cy="0"/>
-        </a:xfrm>
-      </p:grpSpPr>
-      <p:sp>
-        <p:nvSpPr>
-          <p:cNvPr id="2" name="Slide Image Placeholder 1"/>
-          <p:cNvSpPr>
-            <a:spLocks noGrp="1" noRot="1" noChangeAspect="1"/>
-          </p:cNvSpPr>
-          <p:nvPr>
-            <p:ph type="sldImg"/>
-          </p:nvPr>
-        </p:nvSpPr>
-        <p:spPr/>
-      </p:sp>
-      <p:sp>
-        <p:nvSpPr>
-          <p:cNvPr id="3" name="Notes Placeholder 2"/>
-          <p:cNvSpPr>
-            <a:spLocks noGrp="1"/>
-          </p:cNvSpPr>
-          <p:nvPr>
-            <p:ph type="body" idx="1"/>
-          </p:nvPr>
-        </p:nvSpPr>
-        <p:spPr/>
-        <p:txBody>
-          <a:bodyPr/>
-          <a:lstStyle/>
-          <a:p>
-            <a:r>
               <a:rPr lang="en-US" sz="1200" b="0" i="0" kern="1200" dirty="0">
                 <a:solidFill>
                   <a:schemeClr val="tx1"/>
@@ -1608,6 +505,1221 @@
 </p:notes>
 </file>
 
+<file path=ppt/notesSlides/notesSlide11.xml><?xml version="1.0" encoding="utf-8"?>
+<p:notes xmlns:a="http://schemas.openxmlformats.org/drawingml/2006/main" xmlns:r="http://schemas.openxmlformats.org/officeDocument/2006/relationships" xmlns:p="http://schemas.openxmlformats.org/presentationml/2006/main">
+  <p:cSld>
+    <p:spTree>
+      <p:nvGrpSpPr>
+        <p:cNvPr id="1" name=""/>
+        <p:cNvGrpSpPr/>
+        <p:nvPr/>
+      </p:nvGrpSpPr>
+      <p:grpSpPr>
+        <a:xfrm>
+          <a:off x="0" y="0"/>
+          <a:ext cx="0" cy="0"/>
+          <a:chOff x="0" y="0"/>
+          <a:chExt cx="0" cy="0"/>
+        </a:xfrm>
+      </p:grpSpPr>
+      <p:sp>
+        <p:nvSpPr>
+          <p:cNvPr id="2" name="Slide Image Placeholder 1"/>
+          <p:cNvSpPr>
+            <a:spLocks noGrp="1" noRot="1" noChangeAspect="1"/>
+          </p:cNvSpPr>
+          <p:nvPr>
+            <p:ph type="sldImg"/>
+          </p:nvPr>
+        </p:nvSpPr>
+        <p:spPr/>
+      </p:sp>
+      <p:sp>
+        <p:nvSpPr>
+          <p:cNvPr id="3" name="Notes Placeholder 2"/>
+          <p:cNvSpPr>
+            <a:spLocks noGrp="1"/>
+          </p:cNvSpPr>
+          <p:nvPr>
+            <p:ph type="body" idx="1"/>
+          </p:nvPr>
+        </p:nvSpPr>
+        <p:spPr/>
+        <p:txBody>
+          <a:bodyPr/>
+          <a:lstStyle/>
+          <a:p>
+            <a:r>
+              <a:rPr lang="en-US" dirty="0"/>
+              <a:t>The VTA is </a:t>
+            </a:r>
+            <a:r>
+              <a:rPr lang="en-US" b="1" dirty="0"/>
+              <a:t>the dopamine production hub </a:t>
+            </a:r>
+            <a:r>
+              <a:rPr lang="en-US" dirty="0"/>
+              <a:t>of the brain. </a:t>
+            </a:r>
+          </a:p>
+        </p:txBody>
+      </p:sp>
+      <p:sp>
+        <p:nvSpPr>
+          <p:cNvPr id="4" name="Slide Number Placeholder 3"/>
+          <p:cNvSpPr>
+            <a:spLocks noGrp="1"/>
+          </p:cNvSpPr>
+          <p:nvPr>
+            <p:ph type="sldNum" sz="quarter" idx="10"/>
+          </p:nvPr>
+        </p:nvSpPr>
+        <p:spPr/>
+        <p:txBody>
+          <a:bodyPr/>
+          <a:lstStyle/>
+          <a:p>
+            <a:fld id="{F7021451-1387-4CA6-816F-3879F97B5CBC}" type="slidenum">
+              <a:rPr lang="en-US"/>
+              <a:t>12</a:t>
+            </a:fld>
+            <a:endParaRPr lang="en-US"/>
+          </a:p>
+        </p:txBody>
+      </p:sp>
+    </p:spTree>
+    <p:extLst>
+      <p:ext uri="{BB962C8B-B14F-4D97-AF65-F5344CB8AC3E}">
+        <p14:creationId xmlns:p14="http://schemas.microsoft.com/office/powerpoint/2010/main" val="1024086991"/>
+      </p:ext>
+    </p:extLst>
+  </p:cSld>
+  <p:clrMapOvr>
+    <a:masterClrMapping/>
+  </p:clrMapOvr>
+</p:notes>
+</file>
+
+<file path=ppt/notesSlides/notesSlide12.xml><?xml version="1.0" encoding="utf-8"?>
+<p:notes xmlns:a="http://schemas.openxmlformats.org/drawingml/2006/main" xmlns:r="http://schemas.openxmlformats.org/officeDocument/2006/relationships" xmlns:p="http://schemas.openxmlformats.org/presentationml/2006/main">
+  <p:cSld>
+    <p:spTree>
+      <p:nvGrpSpPr>
+        <p:cNvPr id="1" name=""/>
+        <p:cNvGrpSpPr/>
+        <p:nvPr/>
+      </p:nvGrpSpPr>
+      <p:grpSpPr>
+        <a:xfrm>
+          <a:off x="0" y="0"/>
+          <a:ext cx="0" cy="0"/>
+          <a:chOff x="0" y="0"/>
+          <a:chExt cx="0" cy="0"/>
+        </a:xfrm>
+      </p:grpSpPr>
+      <p:sp>
+        <p:nvSpPr>
+          <p:cNvPr id="2" name="Slide Image Placeholder 1"/>
+          <p:cNvSpPr>
+            <a:spLocks noGrp="1" noRot="1" noChangeAspect="1"/>
+          </p:cNvSpPr>
+          <p:nvPr>
+            <p:ph type="sldImg"/>
+          </p:nvPr>
+        </p:nvSpPr>
+        <p:spPr/>
+      </p:sp>
+      <p:sp>
+        <p:nvSpPr>
+          <p:cNvPr id="3" name="Notes Placeholder 2"/>
+          <p:cNvSpPr>
+            <a:spLocks noGrp="1"/>
+          </p:cNvSpPr>
+          <p:nvPr>
+            <p:ph type="body" idx="1"/>
+          </p:nvPr>
+        </p:nvSpPr>
+        <p:spPr/>
+        <p:txBody>
+          <a:bodyPr/>
+          <a:lstStyle/>
+          <a:p>
+            <a:endParaRPr lang="en-US" dirty="0"/>
+          </a:p>
+        </p:txBody>
+      </p:sp>
+      <p:sp>
+        <p:nvSpPr>
+          <p:cNvPr id="4" name="Slide Number Placeholder 3"/>
+          <p:cNvSpPr>
+            <a:spLocks noGrp="1"/>
+          </p:cNvSpPr>
+          <p:nvPr>
+            <p:ph type="sldNum" sz="quarter" idx="10"/>
+          </p:nvPr>
+        </p:nvSpPr>
+        <p:spPr/>
+        <p:txBody>
+          <a:bodyPr/>
+          <a:lstStyle/>
+          <a:p>
+            <a:fld id="{F7021451-1387-4CA6-816F-3879F97B5CBC}" type="slidenum">
+              <a:rPr lang="en-US"/>
+              <a:t>13</a:t>
+            </a:fld>
+            <a:endParaRPr lang="en-US"/>
+          </a:p>
+        </p:txBody>
+      </p:sp>
+    </p:spTree>
+    <p:extLst>
+      <p:ext uri="{BB962C8B-B14F-4D97-AF65-F5344CB8AC3E}">
+        <p14:creationId xmlns:p14="http://schemas.microsoft.com/office/powerpoint/2010/main" val="1024086991"/>
+      </p:ext>
+    </p:extLst>
+  </p:cSld>
+  <p:clrMapOvr>
+    <a:masterClrMapping/>
+  </p:clrMapOvr>
+</p:notes>
+</file>
+
+<file path=ppt/notesSlides/notesSlide13.xml><?xml version="1.0" encoding="utf-8"?>
+<p:notes xmlns:a="http://schemas.openxmlformats.org/drawingml/2006/main" xmlns:r="http://schemas.openxmlformats.org/officeDocument/2006/relationships" xmlns:p="http://schemas.openxmlformats.org/presentationml/2006/main">
+  <p:cSld>
+    <p:spTree>
+      <p:nvGrpSpPr>
+        <p:cNvPr id="1" name=""/>
+        <p:cNvGrpSpPr/>
+        <p:nvPr/>
+      </p:nvGrpSpPr>
+      <p:grpSpPr>
+        <a:xfrm>
+          <a:off x="0" y="0"/>
+          <a:ext cx="0" cy="0"/>
+          <a:chOff x="0" y="0"/>
+          <a:chExt cx="0" cy="0"/>
+        </a:xfrm>
+      </p:grpSpPr>
+      <p:sp>
+        <p:nvSpPr>
+          <p:cNvPr id="2" name="Slide Image Placeholder 1"/>
+          <p:cNvSpPr>
+            <a:spLocks noGrp="1" noRot="1" noChangeAspect="1"/>
+          </p:cNvSpPr>
+          <p:nvPr>
+            <p:ph type="sldImg"/>
+          </p:nvPr>
+        </p:nvSpPr>
+        <p:spPr/>
+      </p:sp>
+      <p:sp>
+        <p:nvSpPr>
+          <p:cNvPr id="3" name="Notes Placeholder 2"/>
+          <p:cNvSpPr>
+            <a:spLocks noGrp="1"/>
+          </p:cNvSpPr>
+          <p:nvPr>
+            <p:ph type="body" idx="1"/>
+          </p:nvPr>
+        </p:nvSpPr>
+        <p:spPr/>
+        <p:txBody>
+          <a:bodyPr/>
+          <a:lstStyle/>
+          <a:p>
+            <a:endParaRPr lang="en-US" dirty="0"/>
+          </a:p>
+        </p:txBody>
+      </p:sp>
+      <p:sp>
+        <p:nvSpPr>
+          <p:cNvPr id="4" name="Slide Number Placeholder 3"/>
+          <p:cNvSpPr>
+            <a:spLocks noGrp="1"/>
+          </p:cNvSpPr>
+          <p:nvPr>
+            <p:ph type="sldNum" sz="quarter" idx="10"/>
+          </p:nvPr>
+        </p:nvSpPr>
+        <p:spPr/>
+        <p:txBody>
+          <a:bodyPr/>
+          <a:lstStyle/>
+          <a:p>
+            <a:fld id="{F7021451-1387-4CA6-816F-3879F97B5CBC}" type="slidenum">
+              <a:rPr lang="en-US"/>
+              <a:t>14</a:t>
+            </a:fld>
+            <a:endParaRPr lang="en-US"/>
+          </a:p>
+        </p:txBody>
+      </p:sp>
+    </p:spTree>
+    <p:extLst>
+      <p:ext uri="{BB962C8B-B14F-4D97-AF65-F5344CB8AC3E}">
+        <p14:creationId xmlns:p14="http://schemas.microsoft.com/office/powerpoint/2010/main" val="1024086991"/>
+      </p:ext>
+    </p:extLst>
+  </p:cSld>
+  <p:clrMapOvr>
+    <a:masterClrMapping/>
+  </p:clrMapOvr>
+</p:notes>
+</file>
+
+<file path=ppt/notesSlides/notesSlide14.xml><?xml version="1.0" encoding="utf-8"?>
+<p:notes xmlns:a="http://schemas.openxmlformats.org/drawingml/2006/main" xmlns:r="http://schemas.openxmlformats.org/officeDocument/2006/relationships" xmlns:p="http://schemas.openxmlformats.org/presentationml/2006/main">
+  <p:cSld>
+    <p:spTree>
+      <p:nvGrpSpPr>
+        <p:cNvPr id="1" name=""/>
+        <p:cNvGrpSpPr/>
+        <p:nvPr/>
+      </p:nvGrpSpPr>
+      <p:grpSpPr>
+        <a:xfrm>
+          <a:off x="0" y="0"/>
+          <a:ext cx="0" cy="0"/>
+          <a:chOff x="0" y="0"/>
+          <a:chExt cx="0" cy="0"/>
+        </a:xfrm>
+      </p:grpSpPr>
+      <p:sp>
+        <p:nvSpPr>
+          <p:cNvPr id="2" name="Slide Image Placeholder 1"/>
+          <p:cNvSpPr>
+            <a:spLocks noGrp="1" noRot="1" noChangeAspect="1"/>
+          </p:cNvSpPr>
+          <p:nvPr>
+            <p:ph type="sldImg"/>
+          </p:nvPr>
+        </p:nvSpPr>
+        <p:spPr/>
+      </p:sp>
+      <p:sp>
+        <p:nvSpPr>
+          <p:cNvPr id="3" name="Notes Placeholder 2"/>
+          <p:cNvSpPr>
+            <a:spLocks noGrp="1"/>
+          </p:cNvSpPr>
+          <p:nvPr>
+            <p:ph type="body" idx="1"/>
+          </p:nvPr>
+        </p:nvSpPr>
+        <p:spPr/>
+        <p:txBody>
+          <a:bodyPr/>
+          <a:lstStyle/>
+          <a:p>
+            <a:endParaRPr lang="en-US" dirty="0"/>
+          </a:p>
+        </p:txBody>
+      </p:sp>
+      <p:sp>
+        <p:nvSpPr>
+          <p:cNvPr id="4" name="Slide Number Placeholder 3"/>
+          <p:cNvSpPr>
+            <a:spLocks noGrp="1"/>
+          </p:cNvSpPr>
+          <p:nvPr>
+            <p:ph type="sldNum" sz="quarter" idx="10"/>
+          </p:nvPr>
+        </p:nvSpPr>
+        <p:spPr/>
+        <p:txBody>
+          <a:bodyPr/>
+          <a:lstStyle/>
+          <a:p>
+            <a:fld id="{F7021451-1387-4CA6-816F-3879F97B5CBC}" type="slidenum">
+              <a:rPr lang="en-US"/>
+              <a:t>15</a:t>
+            </a:fld>
+            <a:endParaRPr lang="en-US"/>
+          </a:p>
+        </p:txBody>
+      </p:sp>
+    </p:spTree>
+    <p:extLst>
+      <p:ext uri="{BB962C8B-B14F-4D97-AF65-F5344CB8AC3E}">
+        <p14:creationId xmlns:p14="http://schemas.microsoft.com/office/powerpoint/2010/main" val="1024086991"/>
+      </p:ext>
+    </p:extLst>
+  </p:cSld>
+  <p:clrMapOvr>
+    <a:masterClrMapping/>
+  </p:clrMapOvr>
+</p:notes>
+</file>
+
+<file path=ppt/notesSlides/notesSlide15.xml><?xml version="1.0" encoding="utf-8"?>
+<p:notes xmlns:a="http://schemas.openxmlformats.org/drawingml/2006/main" xmlns:r="http://schemas.openxmlformats.org/officeDocument/2006/relationships" xmlns:p="http://schemas.openxmlformats.org/presentationml/2006/main">
+  <p:cSld>
+    <p:spTree>
+      <p:nvGrpSpPr>
+        <p:cNvPr id="1" name=""/>
+        <p:cNvGrpSpPr/>
+        <p:nvPr/>
+      </p:nvGrpSpPr>
+      <p:grpSpPr>
+        <a:xfrm>
+          <a:off x="0" y="0"/>
+          <a:ext cx="0" cy="0"/>
+          <a:chOff x="0" y="0"/>
+          <a:chExt cx="0" cy="0"/>
+        </a:xfrm>
+      </p:grpSpPr>
+      <p:sp>
+        <p:nvSpPr>
+          <p:cNvPr id="2" name="Slide Image Placeholder 1"/>
+          <p:cNvSpPr>
+            <a:spLocks noGrp="1" noRot="1" noChangeAspect="1"/>
+          </p:cNvSpPr>
+          <p:nvPr>
+            <p:ph type="sldImg"/>
+          </p:nvPr>
+        </p:nvSpPr>
+        <p:spPr/>
+      </p:sp>
+      <p:sp>
+        <p:nvSpPr>
+          <p:cNvPr id="3" name="Notes Placeholder 2"/>
+          <p:cNvSpPr>
+            <a:spLocks noGrp="1"/>
+          </p:cNvSpPr>
+          <p:nvPr>
+            <p:ph type="body" idx="1"/>
+          </p:nvPr>
+        </p:nvSpPr>
+        <p:spPr/>
+        <p:txBody>
+          <a:bodyPr/>
+          <a:lstStyle/>
+          <a:p>
+            <a:endParaRPr lang="en-US" dirty="0"/>
+          </a:p>
+        </p:txBody>
+      </p:sp>
+      <p:sp>
+        <p:nvSpPr>
+          <p:cNvPr id="4" name="Slide Number Placeholder 3"/>
+          <p:cNvSpPr>
+            <a:spLocks noGrp="1"/>
+          </p:cNvSpPr>
+          <p:nvPr>
+            <p:ph type="sldNum" sz="quarter" idx="10"/>
+          </p:nvPr>
+        </p:nvSpPr>
+        <p:spPr/>
+        <p:txBody>
+          <a:bodyPr/>
+          <a:lstStyle/>
+          <a:p>
+            <a:fld id="{F7021451-1387-4CA6-816F-3879F97B5CBC}" type="slidenum">
+              <a:rPr lang="en-US"/>
+              <a:t>16</a:t>
+            </a:fld>
+            <a:endParaRPr lang="en-US"/>
+          </a:p>
+        </p:txBody>
+      </p:sp>
+    </p:spTree>
+    <p:extLst>
+      <p:ext uri="{BB962C8B-B14F-4D97-AF65-F5344CB8AC3E}">
+        <p14:creationId xmlns:p14="http://schemas.microsoft.com/office/powerpoint/2010/main" val="1024086991"/>
+      </p:ext>
+    </p:extLst>
+  </p:cSld>
+  <p:clrMapOvr>
+    <a:masterClrMapping/>
+  </p:clrMapOvr>
+</p:notes>
+</file>
+
+<file path=ppt/notesSlides/notesSlide16.xml><?xml version="1.0" encoding="utf-8"?>
+<p:notes xmlns:a="http://schemas.openxmlformats.org/drawingml/2006/main" xmlns:r="http://schemas.openxmlformats.org/officeDocument/2006/relationships" xmlns:p="http://schemas.openxmlformats.org/presentationml/2006/main">
+  <p:cSld>
+    <p:spTree>
+      <p:nvGrpSpPr>
+        <p:cNvPr id="1" name=""/>
+        <p:cNvGrpSpPr/>
+        <p:nvPr/>
+      </p:nvGrpSpPr>
+      <p:grpSpPr>
+        <a:xfrm>
+          <a:off x="0" y="0"/>
+          <a:ext cx="0" cy="0"/>
+          <a:chOff x="0" y="0"/>
+          <a:chExt cx="0" cy="0"/>
+        </a:xfrm>
+      </p:grpSpPr>
+      <p:sp>
+        <p:nvSpPr>
+          <p:cNvPr id="2" name="Slide Image Placeholder 1"/>
+          <p:cNvSpPr>
+            <a:spLocks noGrp="1" noRot="1" noChangeAspect="1"/>
+          </p:cNvSpPr>
+          <p:nvPr>
+            <p:ph type="sldImg"/>
+          </p:nvPr>
+        </p:nvSpPr>
+        <p:spPr/>
+      </p:sp>
+      <p:sp>
+        <p:nvSpPr>
+          <p:cNvPr id="3" name="Notes Placeholder 2"/>
+          <p:cNvSpPr>
+            <a:spLocks noGrp="1"/>
+          </p:cNvSpPr>
+          <p:nvPr>
+            <p:ph type="body" idx="1"/>
+          </p:nvPr>
+        </p:nvSpPr>
+        <p:spPr/>
+        <p:txBody>
+          <a:bodyPr/>
+          <a:lstStyle/>
+          <a:p>
+            <a:endParaRPr lang="en-US" dirty="0"/>
+          </a:p>
+        </p:txBody>
+      </p:sp>
+      <p:sp>
+        <p:nvSpPr>
+          <p:cNvPr id="4" name="Slide Number Placeholder 3"/>
+          <p:cNvSpPr>
+            <a:spLocks noGrp="1"/>
+          </p:cNvSpPr>
+          <p:nvPr>
+            <p:ph type="sldNum" sz="quarter" idx="10"/>
+          </p:nvPr>
+        </p:nvSpPr>
+        <p:spPr/>
+        <p:txBody>
+          <a:bodyPr/>
+          <a:lstStyle/>
+          <a:p>
+            <a:fld id="{F7021451-1387-4CA6-816F-3879F97B5CBC}" type="slidenum">
+              <a:rPr lang="en-US"/>
+              <a:t>17</a:t>
+            </a:fld>
+            <a:endParaRPr lang="en-US"/>
+          </a:p>
+        </p:txBody>
+      </p:sp>
+    </p:spTree>
+    <p:extLst>
+      <p:ext uri="{BB962C8B-B14F-4D97-AF65-F5344CB8AC3E}">
+        <p14:creationId xmlns:p14="http://schemas.microsoft.com/office/powerpoint/2010/main" val="1024086991"/>
+      </p:ext>
+    </p:extLst>
+  </p:cSld>
+  <p:clrMapOvr>
+    <a:masterClrMapping/>
+  </p:clrMapOvr>
+</p:notes>
+</file>
+
+<file path=ppt/notesSlides/notesSlide2.xml><?xml version="1.0" encoding="utf-8"?>
+<p:notes xmlns:a="http://schemas.openxmlformats.org/drawingml/2006/main" xmlns:r="http://schemas.openxmlformats.org/officeDocument/2006/relationships" xmlns:p="http://schemas.openxmlformats.org/presentationml/2006/main">
+  <p:cSld>
+    <p:spTree>
+      <p:nvGrpSpPr>
+        <p:cNvPr id="1" name=""/>
+        <p:cNvGrpSpPr/>
+        <p:nvPr/>
+      </p:nvGrpSpPr>
+      <p:grpSpPr>
+        <a:xfrm>
+          <a:off x="0" y="0"/>
+          <a:ext cx="0" cy="0"/>
+          <a:chOff x="0" y="0"/>
+          <a:chExt cx="0" cy="0"/>
+        </a:xfrm>
+      </p:grpSpPr>
+      <p:sp>
+        <p:nvSpPr>
+          <p:cNvPr id="2" name="Slide Image Placeholder 1"/>
+          <p:cNvSpPr>
+            <a:spLocks noGrp="1" noRot="1" noChangeAspect="1"/>
+          </p:cNvSpPr>
+          <p:nvPr>
+            <p:ph type="sldImg"/>
+          </p:nvPr>
+        </p:nvSpPr>
+        <p:spPr/>
+      </p:sp>
+      <p:sp>
+        <p:nvSpPr>
+          <p:cNvPr id="3" name="Notes Placeholder 2"/>
+          <p:cNvSpPr>
+            <a:spLocks noGrp="1"/>
+          </p:cNvSpPr>
+          <p:nvPr>
+            <p:ph type="body" idx="1"/>
+          </p:nvPr>
+        </p:nvSpPr>
+        <p:spPr/>
+        <p:txBody>
+          <a:bodyPr/>
+          <a:lstStyle/>
+          <a:p>
+            <a:endParaRPr lang="en-US" dirty="0"/>
+          </a:p>
+        </p:txBody>
+      </p:sp>
+      <p:sp>
+        <p:nvSpPr>
+          <p:cNvPr id="4" name="Slide Number Placeholder 3"/>
+          <p:cNvSpPr>
+            <a:spLocks noGrp="1"/>
+          </p:cNvSpPr>
+          <p:nvPr>
+            <p:ph type="sldNum" sz="quarter" idx="10"/>
+          </p:nvPr>
+        </p:nvSpPr>
+        <p:spPr/>
+        <p:txBody>
+          <a:bodyPr/>
+          <a:lstStyle/>
+          <a:p>
+            <a:fld id="{F7021451-1387-4CA6-816F-3879F97B5CBC}" type="slidenum">
+              <a:rPr lang="en-US"/>
+              <a:t>2</a:t>
+            </a:fld>
+            <a:endParaRPr lang="en-US"/>
+          </a:p>
+        </p:txBody>
+      </p:sp>
+    </p:spTree>
+    <p:extLst>
+      <p:ext uri="{BB962C8B-B14F-4D97-AF65-F5344CB8AC3E}">
+        <p14:creationId xmlns:p14="http://schemas.microsoft.com/office/powerpoint/2010/main" val="1024086991"/>
+      </p:ext>
+    </p:extLst>
+  </p:cSld>
+  <p:clrMapOvr>
+    <a:masterClrMapping/>
+  </p:clrMapOvr>
+</p:notes>
+</file>
+
+<file path=ppt/notesSlides/notesSlide3.xml><?xml version="1.0" encoding="utf-8"?>
+<p:notes xmlns:a="http://schemas.openxmlformats.org/drawingml/2006/main" xmlns:r="http://schemas.openxmlformats.org/officeDocument/2006/relationships" xmlns:p="http://schemas.openxmlformats.org/presentationml/2006/main">
+  <p:cSld>
+    <p:spTree>
+      <p:nvGrpSpPr>
+        <p:cNvPr id="1" name=""/>
+        <p:cNvGrpSpPr/>
+        <p:nvPr/>
+      </p:nvGrpSpPr>
+      <p:grpSpPr>
+        <a:xfrm>
+          <a:off x="0" y="0"/>
+          <a:ext cx="0" cy="0"/>
+          <a:chOff x="0" y="0"/>
+          <a:chExt cx="0" cy="0"/>
+        </a:xfrm>
+      </p:grpSpPr>
+      <p:sp>
+        <p:nvSpPr>
+          <p:cNvPr id="2" name="Slide Image Placeholder 1"/>
+          <p:cNvSpPr>
+            <a:spLocks noGrp="1" noRot="1" noChangeAspect="1"/>
+          </p:cNvSpPr>
+          <p:nvPr>
+            <p:ph type="sldImg"/>
+          </p:nvPr>
+        </p:nvSpPr>
+        <p:spPr/>
+      </p:sp>
+      <p:sp>
+        <p:nvSpPr>
+          <p:cNvPr id="3" name="Notes Placeholder 2"/>
+          <p:cNvSpPr>
+            <a:spLocks noGrp="1"/>
+          </p:cNvSpPr>
+          <p:nvPr>
+            <p:ph type="body" idx="1"/>
+          </p:nvPr>
+        </p:nvSpPr>
+        <p:spPr/>
+        <p:txBody>
+          <a:bodyPr/>
+          <a:lstStyle/>
+          <a:p>
+            <a:endParaRPr lang="en-US" dirty="0"/>
+          </a:p>
+        </p:txBody>
+      </p:sp>
+      <p:sp>
+        <p:nvSpPr>
+          <p:cNvPr id="4" name="Slide Number Placeholder 3"/>
+          <p:cNvSpPr>
+            <a:spLocks noGrp="1"/>
+          </p:cNvSpPr>
+          <p:nvPr>
+            <p:ph type="sldNum" sz="quarter" idx="10"/>
+          </p:nvPr>
+        </p:nvSpPr>
+        <p:spPr/>
+        <p:txBody>
+          <a:bodyPr/>
+          <a:lstStyle/>
+          <a:p>
+            <a:fld id="{F7021451-1387-4CA6-816F-3879F97B5CBC}" type="slidenum">
+              <a:rPr lang="en-US"/>
+              <a:t>3</a:t>
+            </a:fld>
+            <a:endParaRPr lang="en-US"/>
+          </a:p>
+        </p:txBody>
+      </p:sp>
+    </p:spTree>
+    <p:extLst>
+      <p:ext uri="{BB962C8B-B14F-4D97-AF65-F5344CB8AC3E}">
+        <p14:creationId xmlns:p14="http://schemas.microsoft.com/office/powerpoint/2010/main" val="1024086991"/>
+      </p:ext>
+    </p:extLst>
+  </p:cSld>
+  <p:clrMapOvr>
+    <a:masterClrMapping/>
+  </p:clrMapOvr>
+</p:notes>
+</file>
+
+<file path=ppt/notesSlides/notesSlide4.xml><?xml version="1.0" encoding="utf-8"?>
+<p:notes xmlns:a="http://schemas.openxmlformats.org/drawingml/2006/main" xmlns:r="http://schemas.openxmlformats.org/officeDocument/2006/relationships" xmlns:p="http://schemas.openxmlformats.org/presentationml/2006/main">
+  <p:cSld>
+    <p:spTree>
+      <p:nvGrpSpPr>
+        <p:cNvPr id="1" name=""/>
+        <p:cNvGrpSpPr/>
+        <p:nvPr/>
+      </p:nvGrpSpPr>
+      <p:grpSpPr>
+        <a:xfrm>
+          <a:off x="0" y="0"/>
+          <a:ext cx="0" cy="0"/>
+          <a:chOff x="0" y="0"/>
+          <a:chExt cx="0" cy="0"/>
+        </a:xfrm>
+      </p:grpSpPr>
+      <p:sp>
+        <p:nvSpPr>
+          <p:cNvPr id="2" name="Slide Image Placeholder 1"/>
+          <p:cNvSpPr>
+            <a:spLocks noGrp="1" noRot="1" noChangeAspect="1"/>
+          </p:cNvSpPr>
+          <p:nvPr>
+            <p:ph type="sldImg"/>
+          </p:nvPr>
+        </p:nvSpPr>
+        <p:spPr>
+          <a:xfrm>
+            <a:off x="-171450" y="1143000"/>
+            <a:ext cx="5486400" cy="3086100"/>
+          </a:xfrm>
+          <a:prstGeom prst="rect">
+            <a:avLst/>
+          </a:prstGeom>
+          <a:noFill/>
+          <a:ln w="12700">
+            <a:solidFill>
+              <a:prstClr val="black"/>
+            </a:solidFill>
+          </a:ln>
+        </p:spPr>
+      </p:sp>
+      <p:sp>
+        <p:nvSpPr>
+          <p:cNvPr id="3" name="Notes Placeholder 2"/>
+          <p:cNvSpPr>
+            <a:spLocks noGrp="1"/>
+          </p:cNvSpPr>
+          <p:nvPr>
+            <p:ph type="body" idx="1"/>
+          </p:nvPr>
+        </p:nvSpPr>
+        <p:spPr>
+          <a:xfrm>
+            <a:off x="514350" y="4400550"/>
+            <a:ext cx="4114800" cy="3600450"/>
+          </a:xfrm>
+          <a:prstGeom prst="rect">
+            <a:avLst/>
+          </a:prstGeom>
+        </p:spPr>
+        <p:txBody>
+          <a:bodyPr/>
+          <a:lstStyle/>
+          <a:p>
+            <a:r>
+              <a:rPr lang="en-US" dirty="0"/>
+              <a:t>Striatum learns value predictions (via dopamine-modulated synaptic plasticity) </a:t>
+            </a:r>
+          </a:p>
+          <a:p>
+            <a:r>
+              <a:rPr lang="en-US" dirty="0"/>
+              <a:t>Striatal GABAergic projections suppress VTA activity proportional to expected reward </a:t>
+            </a:r>
+          </a:p>
+          <a:p>
+            <a:r>
+              <a:rPr lang="en-US" dirty="0"/>
+              <a:t>VTA dopamine output encodes the </a:t>
+            </a:r>
+            <a:r>
+              <a:rPr lang="en-US" i="1" dirty="0"/>
+              <a:t>surprise</a:t>
+            </a:r>
+            <a:r>
+              <a:rPr lang="en-US" dirty="0"/>
+              <a:t> — the TD error </a:t>
+            </a:r>
+          </a:p>
+          <a:p>
+            <a:r>
+              <a:rPr lang="en-US" dirty="0"/>
+              <a:t>That error signal modulates synaptic strength in the striatum, updating the prediction</a:t>
+            </a:r>
+          </a:p>
+        </p:txBody>
+      </p:sp>
+    </p:spTree>
+    <p:extLst>
+      <p:ext uri="{BB962C8B-B14F-4D97-AF65-F5344CB8AC3E}">
+        <p14:creationId xmlns:p14="http://schemas.microsoft.com/office/powerpoint/2010/main" val="2023599714"/>
+      </p:ext>
+    </p:extLst>
+  </p:cSld>
+  <p:clrMapOvr>
+    <a:masterClrMapping/>
+  </p:clrMapOvr>
+</p:notes>
+</file>
+
+<file path=ppt/notesSlides/notesSlide5.xml><?xml version="1.0" encoding="utf-8"?>
+<p:notes xmlns:a="http://schemas.openxmlformats.org/drawingml/2006/main" xmlns:r="http://schemas.openxmlformats.org/officeDocument/2006/relationships" xmlns:p="http://schemas.openxmlformats.org/presentationml/2006/main">
+  <p:cSld>
+    <p:spTree>
+      <p:nvGrpSpPr>
+        <p:cNvPr id="1" name=""/>
+        <p:cNvGrpSpPr/>
+        <p:nvPr/>
+      </p:nvGrpSpPr>
+      <p:grpSpPr>
+        <a:xfrm>
+          <a:off x="0" y="0"/>
+          <a:ext cx="0" cy="0"/>
+          <a:chOff x="0" y="0"/>
+          <a:chExt cx="0" cy="0"/>
+        </a:xfrm>
+      </p:grpSpPr>
+      <p:sp>
+        <p:nvSpPr>
+          <p:cNvPr id="2" name="Slide Image Placeholder 1"/>
+          <p:cNvSpPr>
+            <a:spLocks noGrp="1" noRot="1" noChangeAspect="1"/>
+          </p:cNvSpPr>
+          <p:nvPr>
+            <p:ph type="sldImg"/>
+          </p:nvPr>
+        </p:nvSpPr>
+        <p:spPr/>
+      </p:sp>
+      <p:sp>
+        <p:nvSpPr>
+          <p:cNvPr id="3" name="Notes Placeholder 2"/>
+          <p:cNvSpPr>
+            <a:spLocks noGrp="1"/>
+          </p:cNvSpPr>
+          <p:nvPr>
+            <p:ph type="body" idx="1"/>
+          </p:nvPr>
+        </p:nvSpPr>
+        <p:spPr/>
+        <p:txBody>
+          <a:bodyPr/>
+          <a:lstStyle/>
+          <a:p>
+            <a:endParaRPr lang="en-US" dirty="0"/>
+          </a:p>
+        </p:txBody>
+      </p:sp>
+      <p:sp>
+        <p:nvSpPr>
+          <p:cNvPr id="4" name="Slide Number Placeholder 3"/>
+          <p:cNvSpPr>
+            <a:spLocks noGrp="1"/>
+          </p:cNvSpPr>
+          <p:nvPr>
+            <p:ph type="sldNum" sz="quarter" idx="10"/>
+          </p:nvPr>
+        </p:nvSpPr>
+        <p:spPr/>
+        <p:txBody>
+          <a:bodyPr/>
+          <a:lstStyle/>
+          <a:p>
+            <a:fld id="{F7021451-1387-4CA6-816F-3879F97B5CBC}" type="slidenum">
+              <a:rPr lang="en-US"/>
+              <a:t>6</a:t>
+            </a:fld>
+            <a:endParaRPr lang="en-US"/>
+          </a:p>
+        </p:txBody>
+      </p:sp>
+    </p:spTree>
+    <p:extLst>
+      <p:ext uri="{BB962C8B-B14F-4D97-AF65-F5344CB8AC3E}">
+        <p14:creationId xmlns:p14="http://schemas.microsoft.com/office/powerpoint/2010/main" val="1024086991"/>
+      </p:ext>
+    </p:extLst>
+  </p:cSld>
+  <p:clrMapOvr>
+    <a:masterClrMapping/>
+  </p:clrMapOvr>
+</p:notes>
+</file>
+
+<file path=ppt/notesSlides/notesSlide6.xml><?xml version="1.0" encoding="utf-8"?>
+<p:notes xmlns:a="http://schemas.openxmlformats.org/drawingml/2006/main" xmlns:r="http://schemas.openxmlformats.org/officeDocument/2006/relationships" xmlns:p="http://schemas.openxmlformats.org/presentationml/2006/main">
+  <p:cSld>
+    <p:spTree>
+      <p:nvGrpSpPr>
+        <p:cNvPr id="1" name=""/>
+        <p:cNvGrpSpPr/>
+        <p:nvPr/>
+      </p:nvGrpSpPr>
+      <p:grpSpPr>
+        <a:xfrm>
+          <a:off x="0" y="0"/>
+          <a:ext cx="0" cy="0"/>
+          <a:chOff x="0" y="0"/>
+          <a:chExt cx="0" cy="0"/>
+        </a:xfrm>
+      </p:grpSpPr>
+      <p:sp>
+        <p:nvSpPr>
+          <p:cNvPr id="2" name="Slide Image Placeholder 1"/>
+          <p:cNvSpPr>
+            <a:spLocks noGrp="1" noRot="1" noChangeAspect="1"/>
+          </p:cNvSpPr>
+          <p:nvPr>
+            <p:ph type="sldImg"/>
+          </p:nvPr>
+        </p:nvSpPr>
+        <p:spPr/>
+      </p:sp>
+      <p:sp>
+        <p:nvSpPr>
+          <p:cNvPr id="3" name="Notes Placeholder 2"/>
+          <p:cNvSpPr>
+            <a:spLocks noGrp="1"/>
+          </p:cNvSpPr>
+          <p:nvPr>
+            <p:ph type="body" idx="1"/>
+          </p:nvPr>
+        </p:nvSpPr>
+        <p:spPr/>
+        <p:txBody>
+          <a:bodyPr/>
+          <a:lstStyle/>
+          <a:p>
+            <a:endParaRPr lang="en-US" dirty="0"/>
+          </a:p>
+        </p:txBody>
+      </p:sp>
+      <p:sp>
+        <p:nvSpPr>
+          <p:cNvPr id="4" name="Slide Number Placeholder 3"/>
+          <p:cNvSpPr>
+            <a:spLocks noGrp="1"/>
+          </p:cNvSpPr>
+          <p:nvPr>
+            <p:ph type="sldNum" sz="quarter" idx="10"/>
+          </p:nvPr>
+        </p:nvSpPr>
+        <p:spPr/>
+        <p:txBody>
+          <a:bodyPr/>
+          <a:lstStyle/>
+          <a:p>
+            <a:fld id="{F7021451-1387-4CA6-816F-3879F97B5CBC}" type="slidenum">
+              <a:rPr lang="en-US"/>
+              <a:t>7</a:t>
+            </a:fld>
+            <a:endParaRPr lang="en-US"/>
+          </a:p>
+        </p:txBody>
+      </p:sp>
+    </p:spTree>
+    <p:extLst>
+      <p:ext uri="{BB962C8B-B14F-4D97-AF65-F5344CB8AC3E}">
+        <p14:creationId xmlns:p14="http://schemas.microsoft.com/office/powerpoint/2010/main" val="1024086991"/>
+      </p:ext>
+    </p:extLst>
+  </p:cSld>
+  <p:clrMapOvr>
+    <a:masterClrMapping/>
+  </p:clrMapOvr>
+</p:notes>
+</file>
+
+<file path=ppt/notesSlides/notesSlide7.xml><?xml version="1.0" encoding="utf-8"?>
+<p:notes xmlns:a="http://schemas.openxmlformats.org/drawingml/2006/main" xmlns:r="http://schemas.openxmlformats.org/officeDocument/2006/relationships" xmlns:p="http://schemas.openxmlformats.org/presentationml/2006/main">
+  <p:cSld>
+    <p:spTree>
+      <p:nvGrpSpPr>
+        <p:cNvPr id="1" name=""/>
+        <p:cNvGrpSpPr/>
+        <p:nvPr/>
+      </p:nvGrpSpPr>
+      <p:grpSpPr>
+        <a:xfrm>
+          <a:off x="0" y="0"/>
+          <a:ext cx="0" cy="0"/>
+          <a:chOff x="0" y="0"/>
+          <a:chExt cx="0" cy="0"/>
+        </a:xfrm>
+      </p:grpSpPr>
+      <p:sp>
+        <p:nvSpPr>
+          <p:cNvPr id="2" name="Slide Image Placeholder 1"/>
+          <p:cNvSpPr>
+            <a:spLocks noGrp="1" noRot="1" noChangeAspect="1"/>
+          </p:cNvSpPr>
+          <p:nvPr>
+            <p:ph type="sldImg"/>
+          </p:nvPr>
+        </p:nvSpPr>
+        <p:spPr/>
+      </p:sp>
+      <p:sp>
+        <p:nvSpPr>
+          <p:cNvPr id="3" name="Notes Placeholder 2"/>
+          <p:cNvSpPr>
+            <a:spLocks noGrp="1"/>
+          </p:cNvSpPr>
+          <p:nvPr>
+            <p:ph type="body" idx="1"/>
+          </p:nvPr>
+        </p:nvSpPr>
+        <p:spPr/>
+        <p:txBody>
+          <a:bodyPr/>
+          <a:lstStyle/>
+          <a:p>
+            <a:endParaRPr lang="en-US" dirty="0"/>
+          </a:p>
+        </p:txBody>
+      </p:sp>
+      <p:sp>
+        <p:nvSpPr>
+          <p:cNvPr id="4" name="Slide Number Placeholder 3"/>
+          <p:cNvSpPr>
+            <a:spLocks noGrp="1"/>
+          </p:cNvSpPr>
+          <p:nvPr>
+            <p:ph type="sldNum" sz="quarter" idx="10"/>
+          </p:nvPr>
+        </p:nvSpPr>
+        <p:spPr/>
+        <p:txBody>
+          <a:bodyPr/>
+          <a:lstStyle/>
+          <a:p>
+            <a:fld id="{F7021451-1387-4CA6-816F-3879F97B5CBC}" type="slidenum">
+              <a:rPr lang="en-US"/>
+              <a:t>8</a:t>
+            </a:fld>
+            <a:endParaRPr lang="en-US"/>
+          </a:p>
+        </p:txBody>
+      </p:sp>
+    </p:spTree>
+    <p:extLst>
+      <p:ext uri="{BB962C8B-B14F-4D97-AF65-F5344CB8AC3E}">
+        <p14:creationId xmlns:p14="http://schemas.microsoft.com/office/powerpoint/2010/main" val="1024086991"/>
+      </p:ext>
+    </p:extLst>
+  </p:cSld>
+  <p:clrMapOvr>
+    <a:masterClrMapping/>
+  </p:clrMapOvr>
+</p:notes>
+</file>
+
+<file path=ppt/notesSlides/notesSlide8.xml><?xml version="1.0" encoding="utf-8"?>
+<p:notes xmlns:a="http://schemas.openxmlformats.org/drawingml/2006/main" xmlns:r="http://schemas.openxmlformats.org/officeDocument/2006/relationships" xmlns:p="http://schemas.openxmlformats.org/presentationml/2006/main">
+  <p:cSld>
+    <p:spTree>
+      <p:nvGrpSpPr>
+        <p:cNvPr id="1" name=""/>
+        <p:cNvGrpSpPr/>
+        <p:nvPr/>
+      </p:nvGrpSpPr>
+      <p:grpSpPr>
+        <a:xfrm>
+          <a:off x="0" y="0"/>
+          <a:ext cx="0" cy="0"/>
+          <a:chOff x="0" y="0"/>
+          <a:chExt cx="0" cy="0"/>
+        </a:xfrm>
+      </p:grpSpPr>
+      <p:sp>
+        <p:nvSpPr>
+          <p:cNvPr id="2" name="Slide Image Placeholder 1"/>
+          <p:cNvSpPr>
+            <a:spLocks noGrp="1" noRot="1" noChangeAspect="1"/>
+          </p:cNvSpPr>
+          <p:nvPr>
+            <p:ph type="sldImg"/>
+          </p:nvPr>
+        </p:nvSpPr>
+        <p:spPr/>
+      </p:sp>
+      <p:sp>
+        <p:nvSpPr>
+          <p:cNvPr id="3" name="Notes Placeholder 2"/>
+          <p:cNvSpPr>
+            <a:spLocks noGrp="1"/>
+          </p:cNvSpPr>
+          <p:nvPr>
+            <p:ph type="body" idx="1"/>
+          </p:nvPr>
+        </p:nvSpPr>
+        <p:spPr/>
+        <p:txBody>
+          <a:bodyPr/>
+          <a:lstStyle/>
+          <a:p>
+            <a:endParaRPr lang="en-US" dirty="0"/>
+          </a:p>
+        </p:txBody>
+      </p:sp>
+      <p:sp>
+        <p:nvSpPr>
+          <p:cNvPr id="4" name="Slide Number Placeholder 3"/>
+          <p:cNvSpPr>
+            <a:spLocks noGrp="1"/>
+          </p:cNvSpPr>
+          <p:nvPr>
+            <p:ph type="sldNum" sz="quarter" idx="10"/>
+          </p:nvPr>
+        </p:nvSpPr>
+        <p:spPr/>
+        <p:txBody>
+          <a:bodyPr/>
+          <a:lstStyle/>
+          <a:p>
+            <a:fld id="{F7021451-1387-4CA6-816F-3879F97B5CBC}" type="slidenum">
+              <a:rPr lang="en-US"/>
+              <a:t>9</a:t>
+            </a:fld>
+            <a:endParaRPr lang="en-US"/>
+          </a:p>
+        </p:txBody>
+      </p:sp>
+    </p:spTree>
+    <p:extLst>
+      <p:ext uri="{BB962C8B-B14F-4D97-AF65-F5344CB8AC3E}">
+        <p14:creationId xmlns:p14="http://schemas.microsoft.com/office/powerpoint/2010/main" val="1024086991"/>
+      </p:ext>
+    </p:extLst>
+  </p:cSld>
+  <p:clrMapOvr>
+    <a:masterClrMapping/>
+  </p:clrMapOvr>
+</p:notes>
+</file>
+
+<file path=ppt/notesSlides/notesSlide9.xml><?xml version="1.0" encoding="utf-8"?>
+<p:notes xmlns:a="http://schemas.openxmlformats.org/drawingml/2006/main" xmlns:r="http://schemas.openxmlformats.org/officeDocument/2006/relationships" xmlns:p="http://schemas.openxmlformats.org/presentationml/2006/main">
+  <p:cSld>
+    <p:spTree>
+      <p:nvGrpSpPr>
+        <p:cNvPr id="1" name=""/>
+        <p:cNvGrpSpPr/>
+        <p:nvPr/>
+      </p:nvGrpSpPr>
+      <p:grpSpPr>
+        <a:xfrm>
+          <a:off x="0" y="0"/>
+          <a:ext cx="0" cy="0"/>
+          <a:chOff x="0" y="0"/>
+          <a:chExt cx="0" cy="0"/>
+        </a:xfrm>
+      </p:grpSpPr>
+      <p:sp>
+        <p:nvSpPr>
+          <p:cNvPr id="2" name="Slide Image Placeholder 1"/>
+          <p:cNvSpPr>
+            <a:spLocks noGrp="1" noRot="1" noChangeAspect="1"/>
+          </p:cNvSpPr>
+          <p:nvPr>
+            <p:ph type="sldImg"/>
+          </p:nvPr>
+        </p:nvSpPr>
+        <p:spPr/>
+      </p:sp>
+      <p:sp>
+        <p:nvSpPr>
+          <p:cNvPr id="3" name="Notes Placeholder 2"/>
+          <p:cNvSpPr>
+            <a:spLocks noGrp="1"/>
+          </p:cNvSpPr>
+          <p:nvPr>
+            <p:ph type="body" idx="1"/>
+          </p:nvPr>
+        </p:nvSpPr>
+        <p:spPr/>
+        <p:txBody>
+          <a:bodyPr/>
+          <a:lstStyle/>
+          <a:p>
+            <a:endParaRPr lang="en-US" dirty="0"/>
+          </a:p>
+        </p:txBody>
+      </p:sp>
+      <p:sp>
+        <p:nvSpPr>
+          <p:cNvPr id="4" name="Slide Number Placeholder 3"/>
+          <p:cNvSpPr>
+            <a:spLocks noGrp="1"/>
+          </p:cNvSpPr>
+          <p:nvPr>
+            <p:ph type="sldNum" sz="quarter" idx="10"/>
+          </p:nvPr>
+        </p:nvSpPr>
+        <p:spPr/>
+        <p:txBody>
+          <a:bodyPr/>
+          <a:lstStyle/>
+          <a:p>
+            <a:fld id="{F7021451-1387-4CA6-816F-3879F97B5CBC}" type="slidenum">
+              <a:rPr lang="en-US"/>
+              <a:t>10</a:t>
+            </a:fld>
+            <a:endParaRPr lang="en-US"/>
+          </a:p>
+        </p:txBody>
+      </p:sp>
+    </p:spTree>
+    <p:extLst>
+      <p:ext uri="{BB962C8B-B14F-4D97-AF65-F5344CB8AC3E}">
+        <p14:creationId xmlns:p14="http://schemas.microsoft.com/office/powerpoint/2010/main" val="1024086991"/>
+      </p:ext>
+    </p:extLst>
+  </p:cSld>
+  <p:clrMapOvr>
+    <a:masterClrMapping/>
+  </p:clrMapOvr>
+</p:notes>
+</file>
+
 <file path=ppt/slideLayouts/slideLayout1.xml><?xml version="1.0" encoding="utf-8"?>
 <p:sldLayout xmlns:a="http://schemas.openxmlformats.org/drawingml/2006/main" xmlns:r="http://schemas.openxmlformats.org/officeDocument/2006/relationships" xmlns:p="http://schemas.openxmlformats.org/presentationml/2006/main">
   <p:cSld name="DEFAULT">
@@ -1635,13 +1747,13 @@
   <p:clrMapOvr>
     <a:masterClrMapping/>
   </p:clrMapOvr>
-  <mc:AlternateContent xmlns:mc="http://schemas.openxmlformats.org/markup-compatibility/2006">
-    <mc:Choice xmlns:p14="http://schemas.microsoft.com/office/powerpoint/2010/main" Requires="p14">
+  <mc:AlternateContent xmlns:mc="http://schemas.openxmlformats.org/markup-compatibility/2006" xmlns:p14="http://schemas.microsoft.com/office/powerpoint/2010/main">
+    <mc:Choice Requires="p14">
       <p:transition p14:dur="250">
         <p:fade/>
       </p:transition>
     </mc:Choice>
-    <mc:Fallback>
+    <mc:Fallback xmlns="">
       <p:transition>
         <p:fade/>
       </p:transition>
@@ -1678,13 +1790,13 @@
   <p:sldLayoutIdLst>
     <p:sldLayoutId id="2147483651" r:id="rId1"/>
   </p:sldLayoutIdLst>
-  <mc:AlternateContent xmlns:mc="http://schemas.openxmlformats.org/markup-compatibility/2006">
-    <mc:Choice xmlns:p14="http://schemas.microsoft.com/office/powerpoint/2010/main" Requires="p14">
+  <mc:AlternateContent xmlns:mc="http://schemas.openxmlformats.org/markup-compatibility/2006" xmlns:p14="http://schemas.microsoft.com/office/powerpoint/2010/main">
+    <mc:Choice Requires="p14">
       <p:transition p14:dur="250">
         <p:fade/>
       </p:transition>
     </mc:Choice>
-    <mc:Fallback>
+    <mc:Fallback xmlns="">
       <p:transition>
         <p:fade/>
       </p:transition>
@@ -2128,13 +2240,13 @@
   <p:clrMapOvr>
     <a:masterClrMapping/>
   </p:clrMapOvr>
-  <mc:AlternateContent xmlns:mc="http://schemas.openxmlformats.org/markup-compatibility/2006">
-    <mc:Choice xmlns:p14="http://schemas.microsoft.com/office/powerpoint/2010/main" Requires="p14">
+  <mc:AlternateContent xmlns:mc="http://schemas.openxmlformats.org/markup-compatibility/2006" xmlns:p14="http://schemas.microsoft.com/office/powerpoint/2010/main">
+    <mc:Choice Requires="p14">
       <p:transition p14:dur="250">
         <p:fade/>
       </p:transition>
     </mc:Choice>
-    <mc:Fallback>
+    <mc:Fallback xmlns="">
       <p:transition>
         <p:fade/>
       </p:transition>
@@ -2283,13 +2395,13 @@
   <p:clrMapOvr>
     <a:masterClrMapping/>
   </p:clrMapOvr>
-  <mc:AlternateContent xmlns:mc="http://schemas.openxmlformats.org/markup-compatibility/2006">
-    <mc:Choice xmlns:p14="http://schemas.microsoft.com/office/powerpoint/2010/main" Requires="p14">
+  <mc:AlternateContent xmlns:mc="http://schemas.openxmlformats.org/markup-compatibility/2006" xmlns:p14="http://schemas.microsoft.com/office/powerpoint/2010/main">
+    <mc:Choice Requires="p14">
       <p:transition p14:dur="250">
         <p:fade/>
       </p:transition>
     </mc:Choice>
-    <mc:Fallback>
+    <mc:Fallback xmlns="">
       <p:transition>
         <p:fade/>
       </p:transition>
@@ -4705,13 +4817,13 @@
   <p:clrMapOvr>
     <a:masterClrMapping/>
   </p:clrMapOvr>
-  <mc:AlternateContent xmlns:mc="http://schemas.openxmlformats.org/markup-compatibility/2006">
-    <mc:Choice xmlns:p14="http://schemas.microsoft.com/office/powerpoint/2010/main" Requires="p14">
+  <mc:AlternateContent xmlns:mc="http://schemas.openxmlformats.org/markup-compatibility/2006" xmlns:p14="http://schemas.microsoft.com/office/powerpoint/2010/main">
+    <mc:Choice Requires="p14">
       <p:transition p14:dur="250">
         <p:fade/>
       </p:transition>
     </mc:Choice>
-    <mc:Fallback>
+    <mc:Fallback xmlns="">
       <p:transition>
         <p:fade/>
       </p:transition>
@@ -6241,13 +6353,13 @@
   <p:clrMapOvr>
     <a:masterClrMapping/>
   </p:clrMapOvr>
-  <mc:AlternateContent xmlns:mc="http://schemas.openxmlformats.org/markup-compatibility/2006">
-    <mc:Choice xmlns:p14="http://schemas.microsoft.com/office/powerpoint/2010/main" Requires="p14">
+  <mc:AlternateContent xmlns:mc="http://schemas.openxmlformats.org/markup-compatibility/2006" xmlns:p14="http://schemas.microsoft.com/office/powerpoint/2010/main">
+    <mc:Choice Requires="p14">
       <p:transition p14:dur="250">
         <p:fade/>
       </p:transition>
     </mc:Choice>
-    <mc:Fallback>
+    <mc:Fallback xmlns="">
       <p:transition>
         <p:fade/>
       </p:transition>
@@ -8026,13 +8138,13 @@
   <p:clrMapOvr>
     <a:masterClrMapping/>
   </p:clrMapOvr>
-  <mc:AlternateContent xmlns:mc="http://schemas.openxmlformats.org/markup-compatibility/2006">
-    <mc:Choice xmlns:p14="http://schemas.microsoft.com/office/powerpoint/2010/main" Requires="p14">
+  <mc:AlternateContent xmlns:mc="http://schemas.openxmlformats.org/markup-compatibility/2006" xmlns:p14="http://schemas.microsoft.com/office/powerpoint/2010/main">
+    <mc:Choice Requires="p14">
       <p:transition p14:dur="250">
         <p:fade/>
       </p:transition>
     </mc:Choice>
-    <mc:Fallback>
+    <mc:Fallback xmlns="">
       <p:transition>
         <p:fade/>
       </p:transition>
@@ -9098,13 +9210,13 @@
   <p:clrMapOvr>
     <a:masterClrMapping/>
   </p:clrMapOvr>
-  <mc:AlternateContent xmlns:mc="http://schemas.openxmlformats.org/markup-compatibility/2006">
-    <mc:Choice xmlns:p14="http://schemas.microsoft.com/office/powerpoint/2010/main" Requires="p14">
+  <mc:AlternateContent xmlns:mc="http://schemas.openxmlformats.org/markup-compatibility/2006" xmlns:p14="http://schemas.microsoft.com/office/powerpoint/2010/main">
+    <mc:Choice Requires="p14">
       <p:transition p14:dur="250">
         <p:fade/>
       </p:transition>
     </mc:Choice>
-    <mc:Fallback>
+    <mc:Fallback xmlns="">
       <p:transition>
         <p:fade/>
       </p:transition>
@@ -10415,13 +10527,13 @@
   <p:clrMapOvr>
     <a:masterClrMapping/>
   </p:clrMapOvr>
-  <mc:AlternateContent xmlns:mc="http://schemas.openxmlformats.org/markup-compatibility/2006">
-    <mc:Choice xmlns:p14="http://schemas.microsoft.com/office/powerpoint/2010/main" Requires="p14">
+  <mc:AlternateContent xmlns:mc="http://schemas.openxmlformats.org/markup-compatibility/2006" xmlns:p14="http://schemas.microsoft.com/office/powerpoint/2010/main">
+    <mc:Choice Requires="p14">
       <p:transition p14:dur="250">
         <p:fade/>
       </p:transition>
     </mc:Choice>
-    <mc:Fallback>
+    <mc:Fallback xmlns="">
       <p:transition>
         <p:fade/>
       </p:transition>
@@ -11572,13 +11684,13 @@
   <p:clrMapOvr>
     <a:masterClrMapping/>
   </p:clrMapOvr>
-  <mc:AlternateContent xmlns:mc="http://schemas.openxmlformats.org/markup-compatibility/2006">
-    <mc:Choice xmlns:p14="http://schemas.microsoft.com/office/powerpoint/2010/main" Requires="p14">
+  <mc:AlternateContent xmlns:mc="http://schemas.openxmlformats.org/markup-compatibility/2006" xmlns:p14="http://schemas.microsoft.com/office/powerpoint/2010/main">
+    <mc:Choice Requires="p14">
       <p:transition p14:dur="250">
         <p:fade/>
       </p:transition>
     </mc:Choice>
-    <mc:Fallback>
+    <mc:Fallback xmlns="">
       <p:transition>
         <p:fade/>
       </p:transition>
@@ -13366,13 +13478,13 @@
   <p:clrMapOvr>
     <a:masterClrMapping/>
   </p:clrMapOvr>
-  <mc:AlternateContent xmlns:mc="http://schemas.openxmlformats.org/markup-compatibility/2006">
-    <mc:Choice xmlns:p14="http://schemas.microsoft.com/office/powerpoint/2010/main" Requires="p14">
+  <mc:AlternateContent xmlns:mc="http://schemas.openxmlformats.org/markup-compatibility/2006" xmlns:p14="http://schemas.microsoft.com/office/powerpoint/2010/main">
+    <mc:Choice Requires="p14">
       <p:transition p14:dur="250">
         <p:fade/>
       </p:transition>
     </mc:Choice>
-    <mc:Fallback>
+    <mc:Fallback xmlns="">
       <p:transition>
         <p:fade/>
       </p:transition>
@@ -14238,13 +14350,13 @@
   <p:clrMapOvr>
     <a:masterClrMapping/>
   </p:clrMapOvr>
-  <mc:AlternateContent xmlns:mc="http://schemas.openxmlformats.org/markup-compatibility/2006">
-    <mc:Choice xmlns:p14="http://schemas.microsoft.com/office/powerpoint/2010/main" Requires="p14">
+  <mc:AlternateContent xmlns:mc="http://schemas.openxmlformats.org/markup-compatibility/2006" xmlns:p14="http://schemas.microsoft.com/office/powerpoint/2010/main">
+    <mc:Choice Requires="p14">
       <p:transition p14:dur="250">
         <p:fade/>
       </p:transition>
     </mc:Choice>
-    <mc:Fallback>
+    <mc:Fallback xmlns="">
       <p:transition>
         <p:fade/>
       </p:transition>
@@ -14393,13 +14505,13 @@
   <p:clrMapOvr>
     <a:masterClrMapping/>
   </p:clrMapOvr>
-  <mc:AlternateContent xmlns:mc="http://schemas.openxmlformats.org/markup-compatibility/2006">
-    <mc:Choice xmlns:p14="http://schemas.microsoft.com/office/powerpoint/2010/main" Requires="p14">
+  <mc:AlternateContent xmlns:mc="http://schemas.openxmlformats.org/markup-compatibility/2006" xmlns:p14="http://schemas.microsoft.com/office/powerpoint/2010/main">
+    <mc:Choice Requires="p14">
       <p:transition p14:dur="250">
         <p:fade/>
       </p:transition>
     </mc:Choice>
-    <mc:Fallback>
+    <mc:Fallback xmlns="">
       <p:transition>
         <p:fade/>
       </p:transition>
@@ -14569,7 +14681,7 @@
         <p:spPr>
           <a:xfrm>
             <a:off x="279400" y="863600"/>
-            <a:ext cx="8585200" cy="939800"/>
+            <a:ext cx="4584700" cy="939800"/>
           </a:xfrm>
           <a:prstGeom prst="rect">
             <a:avLst/>
@@ -14631,7 +14743,7 @@
         <p:spPr>
           <a:xfrm>
             <a:off x="406400" y="939800"/>
-            <a:ext cx="8407400" cy="279400"/>
+            <a:ext cx="4457700" cy="279400"/>
           </a:xfrm>
           <a:prstGeom prst="rect">
             <a:avLst/>
@@ -14671,7 +14783,7 @@
         <p:spPr>
           <a:xfrm>
             <a:off x="406400" y="1270000"/>
-            <a:ext cx="8407400" cy="482600"/>
+            <a:ext cx="4457700" cy="482600"/>
           </a:xfrm>
           <a:prstGeom prst="rect">
             <a:avLst/>
@@ -14712,7 +14824,7 @@
         <p:spPr>
           <a:xfrm>
             <a:off x="279400" y="1930400"/>
-            <a:ext cx="8585200" cy="939800"/>
+            <a:ext cx="4584700" cy="939800"/>
           </a:xfrm>
           <a:prstGeom prst="rect">
             <a:avLst/>
@@ -14774,7 +14886,7 @@
         <p:spPr>
           <a:xfrm>
             <a:off x="406400" y="2006600"/>
-            <a:ext cx="8407400" cy="279400"/>
+            <a:ext cx="4457700" cy="279400"/>
           </a:xfrm>
           <a:prstGeom prst="rect">
             <a:avLst/>
@@ -14814,7 +14926,7 @@
         <p:spPr>
           <a:xfrm>
             <a:off x="406400" y="2336800"/>
-            <a:ext cx="8407400" cy="482600"/>
+            <a:ext cx="4457700" cy="482600"/>
           </a:xfrm>
           <a:prstGeom prst="rect">
             <a:avLst/>
@@ -14855,7 +14967,7 @@
         <p:spPr>
           <a:xfrm>
             <a:off x="279400" y="2997200"/>
-            <a:ext cx="8585200" cy="939800"/>
+            <a:ext cx="4594860" cy="939800"/>
           </a:xfrm>
           <a:prstGeom prst="rect">
             <a:avLst/>
@@ -14917,7 +15029,7 @@
         <p:spPr>
           <a:xfrm>
             <a:off x="406400" y="3073400"/>
-            <a:ext cx="8407400" cy="279400"/>
+            <a:ext cx="4467860" cy="279400"/>
           </a:xfrm>
           <a:prstGeom prst="rect">
             <a:avLst/>
@@ -14957,7 +15069,7 @@
         <p:spPr>
           <a:xfrm>
             <a:off x="406400" y="3403600"/>
-            <a:ext cx="8407400" cy="482600"/>
+            <a:ext cx="4457700" cy="482600"/>
           </a:xfrm>
           <a:prstGeom prst="rect">
             <a:avLst/>
@@ -14998,7 +15110,7 @@
         <p:spPr>
           <a:xfrm>
             <a:off x="279400" y="4064000"/>
-            <a:ext cx="8585200" cy="939800"/>
+            <a:ext cx="4594860" cy="939800"/>
           </a:xfrm>
           <a:prstGeom prst="rect">
             <a:avLst/>
@@ -15060,7 +15172,7 @@
         <p:spPr>
           <a:xfrm>
             <a:off x="406400" y="4140200"/>
-            <a:ext cx="8407400" cy="279400"/>
+            <a:ext cx="4467860" cy="279400"/>
           </a:xfrm>
           <a:prstGeom prst="rect">
             <a:avLst/>
@@ -15100,7 +15212,7 @@
         <p:spPr>
           <a:xfrm>
             <a:off x="406400" y="4470400"/>
-            <a:ext cx="8407400" cy="482600"/>
+            <a:ext cx="4467860" cy="482600"/>
           </a:xfrm>
           <a:prstGeom prst="rect">
             <a:avLst/>
@@ -15125,11 +15237,88 @@
                 </a:solidFill>
                 <a:latin typeface="Calibri" pitchFamily="34" charset="0"/>
               </a:rPr>
-              <a:t>Learned associations weaken without reinforcement and can reappear spontaneously — showing that experience shapes behaviour in ways that are dynamic, not fixed.</a:t>
+              <a:t>Learned associations weaken without reinforcement and can reappear spontaneously —experience shapes behavior dynamically</a:t>
             </a:r>
           </a:p>
         </p:txBody>
       </p:sp>
+      <p:pic>
+        <p:nvPicPr>
+          <p:cNvPr id="1026" name="Picture 2" descr="Who was the man behind Pavlov’s Dog? - Russia Beyond">
+            <a:extLst>
+              <a:ext uri="{FF2B5EF4-FFF2-40B4-BE49-F238E27FC236}">
+                <a16:creationId xmlns:a16="http://schemas.microsoft.com/office/drawing/2014/main" id="{4C971250-6A06-C798-8841-89FCEB30CC76}"/>
+              </a:ext>
+            </a:extLst>
+          </p:cNvPr>
+          <p:cNvPicPr>
+            <a:picLocks noChangeAspect="1" noChangeArrowheads="1"/>
+          </p:cNvPicPr>
+          <p:nvPr/>
+        </p:nvPicPr>
+        <p:blipFill>
+          <a:blip r:embed="rId2">
+            <a:extLst>
+              <a:ext uri="{28A0092B-C50C-407E-A947-70E740481C1C}">
+                <a14:useLocalDpi xmlns:a14="http://schemas.microsoft.com/office/drawing/2010/main" val="0"/>
+              </a:ext>
+            </a:extLst>
+          </a:blip>
+          <a:srcRect/>
+          <a:stretch>
+            <a:fillRect/>
+          </a:stretch>
+        </p:blipFill>
+        <p:spPr bwMode="auto">
+          <a:xfrm>
+            <a:off x="5550041" y="869950"/>
+            <a:ext cx="3039603" cy="1949450"/>
+          </a:xfrm>
+          <a:prstGeom prst="rect">
+            <a:avLst/>
+          </a:prstGeom>
+          <a:noFill/>
+          <a:extLst>
+            <a:ext uri="{909E8E84-426E-40DD-AFC4-6F175D3DCCD1}">
+              <a14:hiddenFill xmlns:a14="http://schemas.microsoft.com/office/drawing/2010/main">
+                <a:solidFill>
+                  <a:srgbClr val="FFFFFF"/>
+                </a:solidFill>
+              </a14:hiddenFill>
+            </a:ext>
+          </a:extLst>
+        </p:spPr>
+      </p:pic>
+      <p:pic>
+        <p:nvPicPr>
+          <p:cNvPr id="3" name="Picture 2">
+            <a:extLst>
+              <a:ext uri="{FF2B5EF4-FFF2-40B4-BE49-F238E27FC236}">
+                <a16:creationId xmlns:a16="http://schemas.microsoft.com/office/drawing/2014/main" id="{B34515CF-4644-96EB-4C5F-A469864E7D3E}"/>
+              </a:ext>
+            </a:extLst>
+          </p:cNvPr>
+          <p:cNvPicPr>
+            <a:picLocks noChangeAspect="1"/>
+          </p:cNvPicPr>
+          <p:nvPr/>
+        </p:nvPicPr>
+        <p:blipFill>
+          <a:blip r:embed="rId3"/>
+          <a:stretch>
+            <a:fillRect/>
+          </a:stretch>
+        </p:blipFill>
+        <p:spPr>
+          <a:xfrm>
+            <a:off x="5550041" y="2933700"/>
+            <a:ext cx="3028950" cy="2019300"/>
+          </a:xfrm>
+          <a:prstGeom prst="rect">
+            <a:avLst/>
+          </a:prstGeom>
+        </p:spPr>
+      </p:pic>
     </p:spTree>
     <p:extLst>
       <p:ext uri="{BB962C8B-B14F-4D97-AF65-F5344CB8AC3E}">
@@ -15140,13 +15329,13 @@
   <p:clrMapOvr>
     <a:masterClrMapping/>
   </p:clrMapOvr>
-  <mc:AlternateContent xmlns:mc="http://schemas.openxmlformats.org/markup-compatibility/2006">
-    <mc:Choice xmlns:p14="http://schemas.microsoft.com/office/powerpoint/2010/main" Requires="p14">
+  <mc:AlternateContent xmlns:mc="http://schemas.openxmlformats.org/markup-compatibility/2006" xmlns:p14="http://schemas.microsoft.com/office/powerpoint/2010/main">
+    <mc:Choice Requires="p14">
       <p:transition p14:dur="250">
         <p:fade/>
       </p:transition>
     </mc:Choice>
-    <mc:Fallback>
+    <mc:Fallback xmlns="">
       <p:transition>
         <p:fade/>
       </p:transition>
@@ -15369,7 +15558,7 @@
                                 </p:cTn>
                               </p:par>
                               <p:par>
-                                <p:cTn id="22" presetID="10" presetClass="entr" presetSubtype="0" fill="hold" grpId="0" nodeType="withEffect">
+                                <p:cTn id="22" presetID="10" presetClass="entr" presetSubtype="0" fill="hold" nodeType="withEffect">
                                   <p:stCondLst>
                                     <p:cond delay="0"/>
                                   </p:stCondLst>
@@ -15382,7 +15571,7 @@
                                           </p:stCondLst>
                                         </p:cTn>
                                         <p:tgtEl>
-                                          <p:spTgt spid="25"/>
+                                          <p:spTgt spid="3"/>
                                         </p:tgtEl>
                                         <p:attrNameLst>
                                           <p:attrName>style.visibility</p:attrName>
@@ -15396,7 +15585,7 @@
                                       <p:cBhvr>
                                         <p:cTn id="24" dur="100"/>
                                         <p:tgtEl>
-                                          <p:spTgt spid="25"/>
+                                          <p:spTgt spid="3"/>
                                         </p:tgtEl>
                                       </p:cBhvr>
                                     </p:animEffect>
@@ -15417,7 +15606,7 @@
                                           </p:stCondLst>
                                         </p:cTn>
                                         <p:tgtEl>
-                                          <p:spTgt spid="26"/>
+                                          <p:spTgt spid="25"/>
                                         </p:tgtEl>
                                         <p:attrNameLst>
                                           <p:attrName>style.visibility</p:attrName>
@@ -15431,7 +15620,7 @@
                                       <p:cBhvr>
                                         <p:cTn id="27" dur="100"/>
                                         <p:tgtEl>
-                                          <p:spTgt spid="26"/>
+                                          <p:spTgt spid="25"/>
                                         </p:tgtEl>
                                       </p:cBhvr>
                                     </p:animEffect>
@@ -15452,7 +15641,7 @@
                                           </p:stCondLst>
                                         </p:cTn>
                                         <p:tgtEl>
-                                          <p:spTgt spid="27"/>
+                                          <p:spTgt spid="26"/>
                                         </p:tgtEl>
                                         <p:attrNameLst>
                                           <p:attrName>style.visibility</p:attrName>
@@ -15465,6 +15654,41 @@
                                     <p:animEffect transition="in" filter="fade">
                                       <p:cBhvr>
                                         <p:cTn id="30" dur="100"/>
+                                        <p:tgtEl>
+                                          <p:spTgt spid="26"/>
+                                        </p:tgtEl>
+                                      </p:cBhvr>
+                                    </p:animEffect>
+                                  </p:childTnLst>
+                                </p:cTn>
+                              </p:par>
+                              <p:par>
+                                <p:cTn id="31" presetID="10" presetClass="entr" presetSubtype="0" fill="hold" grpId="0" nodeType="withEffect">
+                                  <p:stCondLst>
+                                    <p:cond delay="0"/>
+                                  </p:stCondLst>
+                                  <p:childTnLst>
+                                    <p:set>
+                                      <p:cBhvr>
+                                        <p:cTn id="32" dur="1" fill="hold">
+                                          <p:stCondLst>
+                                            <p:cond delay="0"/>
+                                          </p:stCondLst>
+                                        </p:cTn>
+                                        <p:tgtEl>
+                                          <p:spTgt spid="27"/>
+                                        </p:tgtEl>
+                                        <p:attrNameLst>
+                                          <p:attrName>style.visibility</p:attrName>
+                                        </p:attrNameLst>
+                                      </p:cBhvr>
+                                      <p:to>
+                                        <p:strVal val="visible"/>
+                                      </p:to>
+                                    </p:set>
+                                    <p:animEffect transition="in" filter="fade">
+                                      <p:cBhvr>
+                                        <p:cTn id="33" dur="100"/>
                                         <p:tgtEl>
                                           <p:spTgt spid="27"/>
                                         </p:tgtEl>
@@ -15480,26 +15704,26 @@
                     </p:cTn>
                   </p:par>
                   <p:par>
-                    <p:cTn id="31" fill="hold">
+                    <p:cTn id="34" fill="hold">
                       <p:stCondLst>
                         <p:cond delay="indefinite"/>
                       </p:stCondLst>
                       <p:childTnLst>
                         <p:par>
-                          <p:cTn id="32" fill="hold">
+                          <p:cTn id="35" fill="hold">
                             <p:stCondLst>
                               <p:cond delay="0"/>
                             </p:stCondLst>
                             <p:childTnLst>
                               <p:par>
-                                <p:cTn id="33" presetID="10" presetClass="entr" presetSubtype="0" fill="hold" grpId="0" nodeType="clickEffect">
+                                <p:cTn id="36" presetID="10" presetClass="entr" presetSubtype="0" fill="hold" grpId="0" nodeType="clickEffect">
                                   <p:stCondLst>
                                     <p:cond delay="0"/>
                                   </p:stCondLst>
                                   <p:childTnLst>
                                     <p:set>
                                       <p:cBhvr>
-                                        <p:cTn id="34" dur="1" fill="hold">
+                                        <p:cTn id="37" dur="1" fill="hold">
                                           <p:stCondLst>
                                             <p:cond delay="0"/>
                                           </p:stCondLst>
@@ -15517,44 +15741,9 @@
                                     </p:set>
                                     <p:animEffect transition="in" filter="fade">
                                       <p:cBhvr>
-                                        <p:cTn id="35" dur="100"/>
+                                        <p:cTn id="38" dur="100"/>
                                         <p:tgtEl>
                                           <p:spTgt spid="28"/>
-                                        </p:tgtEl>
-                                      </p:cBhvr>
-                                    </p:animEffect>
-                                  </p:childTnLst>
-                                </p:cTn>
-                              </p:par>
-                              <p:par>
-                                <p:cTn id="36" presetID="10" presetClass="entr" presetSubtype="0" fill="hold" grpId="0" nodeType="withEffect">
-                                  <p:stCondLst>
-                                    <p:cond delay="0"/>
-                                  </p:stCondLst>
-                                  <p:childTnLst>
-                                    <p:set>
-                                      <p:cBhvr>
-                                        <p:cTn id="37" dur="1" fill="hold">
-                                          <p:stCondLst>
-                                            <p:cond delay="0"/>
-                                          </p:stCondLst>
-                                        </p:cTn>
-                                        <p:tgtEl>
-                                          <p:spTgt spid="29"/>
-                                        </p:tgtEl>
-                                        <p:attrNameLst>
-                                          <p:attrName>style.visibility</p:attrName>
-                                        </p:attrNameLst>
-                                      </p:cBhvr>
-                                      <p:to>
-                                        <p:strVal val="visible"/>
-                                      </p:to>
-                                    </p:set>
-                                    <p:animEffect transition="in" filter="fade">
-                                      <p:cBhvr>
-                                        <p:cTn id="38" dur="100"/>
-                                        <p:tgtEl>
-                                          <p:spTgt spid="29"/>
                                         </p:tgtEl>
                                       </p:cBhvr>
                                     </p:animEffect>
@@ -15575,7 +15764,7 @@
                                           </p:stCondLst>
                                         </p:cTn>
                                         <p:tgtEl>
-                                          <p:spTgt spid="30"/>
+                                          <p:spTgt spid="29"/>
                                         </p:tgtEl>
                                         <p:attrNameLst>
                                           <p:attrName>style.visibility</p:attrName>
@@ -15589,7 +15778,7 @@
                                       <p:cBhvr>
                                         <p:cTn id="41" dur="100"/>
                                         <p:tgtEl>
-                                          <p:spTgt spid="30"/>
+                                          <p:spTgt spid="29"/>
                                         </p:tgtEl>
                                       </p:cBhvr>
                                     </p:animEffect>
@@ -15610,7 +15799,7 @@
                                           </p:stCondLst>
                                         </p:cTn>
                                         <p:tgtEl>
-                                          <p:spTgt spid="31"/>
+                                          <p:spTgt spid="30"/>
                                         </p:tgtEl>
                                         <p:attrNameLst>
                                           <p:attrName>style.visibility</p:attrName>
@@ -15623,6 +15812,41 @@
                                     <p:animEffect transition="in" filter="fade">
                                       <p:cBhvr>
                                         <p:cTn id="44" dur="100"/>
+                                        <p:tgtEl>
+                                          <p:spTgt spid="30"/>
+                                        </p:tgtEl>
+                                      </p:cBhvr>
+                                    </p:animEffect>
+                                  </p:childTnLst>
+                                </p:cTn>
+                              </p:par>
+                              <p:par>
+                                <p:cTn id="45" presetID="10" presetClass="entr" presetSubtype="0" fill="hold" grpId="0" nodeType="withEffect">
+                                  <p:stCondLst>
+                                    <p:cond delay="0"/>
+                                  </p:stCondLst>
+                                  <p:childTnLst>
+                                    <p:set>
+                                      <p:cBhvr>
+                                        <p:cTn id="46" dur="1" fill="hold">
+                                          <p:stCondLst>
+                                            <p:cond delay="0"/>
+                                          </p:stCondLst>
+                                        </p:cTn>
+                                        <p:tgtEl>
+                                          <p:spTgt spid="31"/>
+                                        </p:tgtEl>
+                                        <p:attrNameLst>
+                                          <p:attrName>style.visibility</p:attrName>
+                                        </p:attrNameLst>
+                                      </p:cBhvr>
+                                      <p:to>
+                                        <p:strVal val="visible"/>
+                                      </p:to>
+                                    </p:set>
+                                    <p:animEffect transition="in" filter="fade">
+                                      <p:cBhvr>
+                                        <p:cTn id="47" dur="100"/>
                                         <p:tgtEl>
                                           <p:spTgt spid="31"/>
                                         </p:tgtEl>
@@ -15638,26 +15862,26 @@
                     </p:cTn>
                   </p:par>
                   <p:par>
-                    <p:cTn id="45" fill="hold">
+                    <p:cTn id="48" fill="hold">
                       <p:stCondLst>
                         <p:cond delay="indefinite"/>
                       </p:stCondLst>
                       <p:childTnLst>
                         <p:par>
-                          <p:cTn id="46" fill="hold">
+                          <p:cTn id="49" fill="hold">
                             <p:stCondLst>
                               <p:cond delay="0"/>
                             </p:stCondLst>
                             <p:childTnLst>
                               <p:par>
-                                <p:cTn id="47" presetID="10" presetClass="entr" presetSubtype="0" fill="hold" grpId="0" nodeType="clickEffect">
+                                <p:cTn id="50" presetID="10" presetClass="entr" presetSubtype="0" fill="hold" grpId="0" nodeType="clickEffect">
                                   <p:stCondLst>
                                     <p:cond delay="0"/>
                                   </p:stCondLst>
                                   <p:childTnLst>
                                     <p:set>
                                       <p:cBhvr>
-                                        <p:cTn id="48" dur="1" fill="hold">
+                                        <p:cTn id="51" dur="1" fill="hold">
                                           <p:stCondLst>
                                             <p:cond delay="0"/>
                                           </p:stCondLst>
@@ -15675,44 +15899,9 @@
                                     </p:set>
                                     <p:animEffect transition="in" filter="fade">
                                       <p:cBhvr>
-                                        <p:cTn id="49" dur="100"/>
+                                        <p:cTn id="52" dur="100"/>
                                         <p:tgtEl>
                                           <p:spTgt spid="60"/>
-                                        </p:tgtEl>
-                                      </p:cBhvr>
-                                    </p:animEffect>
-                                  </p:childTnLst>
-                                </p:cTn>
-                              </p:par>
-                              <p:par>
-                                <p:cTn id="50" presetID="10" presetClass="entr" presetSubtype="0" fill="hold" grpId="0" nodeType="withEffect">
-                                  <p:stCondLst>
-                                    <p:cond delay="0"/>
-                                  </p:stCondLst>
-                                  <p:childTnLst>
-                                    <p:set>
-                                      <p:cBhvr>
-                                        <p:cTn id="51" dur="1" fill="hold">
-                                          <p:stCondLst>
-                                            <p:cond delay="0"/>
-                                          </p:stCondLst>
-                                        </p:cTn>
-                                        <p:tgtEl>
-                                          <p:spTgt spid="61"/>
-                                        </p:tgtEl>
-                                        <p:attrNameLst>
-                                          <p:attrName>style.visibility</p:attrName>
-                                        </p:attrNameLst>
-                                      </p:cBhvr>
-                                      <p:to>
-                                        <p:strVal val="visible"/>
-                                      </p:to>
-                                    </p:set>
-                                    <p:animEffect transition="in" filter="fade">
-                                      <p:cBhvr>
-                                        <p:cTn id="52" dur="100"/>
-                                        <p:tgtEl>
-                                          <p:spTgt spid="61"/>
                                         </p:tgtEl>
                                       </p:cBhvr>
                                     </p:animEffect>
@@ -15733,7 +15922,7 @@
                                           </p:stCondLst>
                                         </p:cTn>
                                         <p:tgtEl>
-                                          <p:spTgt spid="62"/>
+                                          <p:spTgt spid="61"/>
                                         </p:tgtEl>
                                         <p:attrNameLst>
                                           <p:attrName>style.visibility</p:attrName>
@@ -15747,7 +15936,7 @@
                                       <p:cBhvr>
                                         <p:cTn id="55" dur="100"/>
                                         <p:tgtEl>
-                                          <p:spTgt spid="62"/>
+                                          <p:spTgt spid="61"/>
                                         </p:tgtEl>
                                       </p:cBhvr>
                                     </p:animEffect>
@@ -15768,7 +15957,7 @@
                                           </p:stCondLst>
                                         </p:cTn>
                                         <p:tgtEl>
-                                          <p:spTgt spid="63"/>
+                                          <p:spTgt spid="62"/>
                                         </p:tgtEl>
                                         <p:attrNameLst>
                                           <p:attrName>style.visibility</p:attrName>
@@ -15781,6 +15970,41 @@
                                     <p:animEffect transition="in" filter="fade">
                                       <p:cBhvr>
                                         <p:cTn id="58" dur="100"/>
+                                        <p:tgtEl>
+                                          <p:spTgt spid="62"/>
+                                        </p:tgtEl>
+                                      </p:cBhvr>
+                                    </p:animEffect>
+                                  </p:childTnLst>
+                                </p:cTn>
+                              </p:par>
+                              <p:par>
+                                <p:cTn id="59" presetID="10" presetClass="entr" presetSubtype="0" fill="hold" grpId="0" nodeType="withEffect">
+                                  <p:stCondLst>
+                                    <p:cond delay="0"/>
+                                  </p:stCondLst>
+                                  <p:childTnLst>
+                                    <p:set>
+                                      <p:cBhvr>
+                                        <p:cTn id="60" dur="1" fill="hold">
+                                          <p:stCondLst>
+                                            <p:cond delay="0"/>
+                                          </p:stCondLst>
+                                        </p:cTn>
+                                        <p:tgtEl>
+                                          <p:spTgt spid="63"/>
+                                        </p:tgtEl>
+                                        <p:attrNameLst>
+                                          <p:attrName>style.visibility</p:attrName>
+                                        </p:attrNameLst>
+                                      </p:cBhvr>
+                                      <p:to>
+                                        <p:strVal val="visible"/>
+                                      </p:to>
+                                    </p:set>
+                                    <p:animEffect transition="in" filter="fade">
+                                      <p:cBhvr>
+                                        <p:cTn id="61" dur="100"/>
                                         <p:tgtEl>
                                           <p:spTgt spid="63"/>
                                         </p:tgtEl>
@@ -15998,8 +16222,8 @@
         </p:nvSpPr>
         <p:spPr>
           <a:xfrm>
-            <a:off x="279400" y="863600"/>
-            <a:ext cx="8585200" cy="939800"/>
+            <a:off x="4570413" y="4069080"/>
+            <a:ext cx="4292600" cy="939800"/>
           </a:xfrm>
           <a:prstGeom prst="rect">
             <a:avLst/>
@@ -16029,7 +16253,7 @@
         </p:nvSpPr>
         <p:spPr>
           <a:xfrm>
-            <a:off x="279400" y="863600"/>
+            <a:off x="4508500" y="4069080"/>
             <a:ext cx="63500" cy="939800"/>
           </a:xfrm>
           <a:prstGeom prst="rect">
@@ -16060,8 +16284,8 @@
         </p:nvSpPr>
         <p:spPr>
           <a:xfrm>
-            <a:off x="406400" y="939800"/>
-            <a:ext cx="8407400" cy="279400"/>
+            <a:off x="4608513" y="4145280"/>
+            <a:ext cx="4203700" cy="279400"/>
           </a:xfrm>
           <a:prstGeom prst="rect">
             <a:avLst/>
@@ -16100,8 +16324,8 @@
         </p:nvSpPr>
         <p:spPr>
           <a:xfrm>
-            <a:off x="406400" y="1270000"/>
-            <a:ext cx="8407400" cy="482600"/>
+            <a:off x="4570413" y="4406900"/>
+            <a:ext cx="4203700" cy="482600"/>
           </a:xfrm>
           <a:prstGeom prst="rect">
             <a:avLst/>
@@ -16141,8 +16365,8 @@
         </p:nvSpPr>
         <p:spPr>
           <a:xfrm>
-            <a:off x="279400" y="1930400"/>
-            <a:ext cx="8585200" cy="939800"/>
+            <a:off x="4577083" y="873760"/>
+            <a:ext cx="4292600" cy="939800"/>
           </a:xfrm>
           <a:prstGeom prst="rect">
             <a:avLst/>
@@ -16172,7 +16396,7 @@
         </p:nvSpPr>
         <p:spPr>
           <a:xfrm>
-            <a:off x="279400" y="1930400"/>
+            <a:off x="4513583" y="873760"/>
             <a:ext cx="63500" cy="939800"/>
           </a:xfrm>
           <a:prstGeom prst="rect">
@@ -16203,8 +16427,8 @@
         </p:nvSpPr>
         <p:spPr>
           <a:xfrm>
-            <a:off x="406400" y="2006600"/>
-            <a:ext cx="8407400" cy="279400"/>
+            <a:off x="4577083" y="949960"/>
+            <a:ext cx="4241800" cy="279400"/>
           </a:xfrm>
           <a:prstGeom prst="rect">
             <a:avLst/>
@@ -16243,8 +16467,8 @@
         </p:nvSpPr>
         <p:spPr>
           <a:xfrm>
-            <a:off x="406400" y="2336800"/>
-            <a:ext cx="8407400" cy="482600"/>
+            <a:off x="4577083" y="1219200"/>
+            <a:ext cx="4241800" cy="482600"/>
           </a:xfrm>
           <a:prstGeom prst="rect">
             <a:avLst/>
@@ -16284,8 +16508,8 @@
         </p:nvSpPr>
         <p:spPr>
           <a:xfrm>
-            <a:off x="279400" y="2997200"/>
-            <a:ext cx="8585200" cy="939800"/>
+            <a:off x="4577083" y="1940560"/>
+            <a:ext cx="4292600" cy="939800"/>
           </a:xfrm>
           <a:prstGeom prst="rect">
             <a:avLst/>
@@ -16315,7 +16539,7 @@
         </p:nvSpPr>
         <p:spPr>
           <a:xfrm>
-            <a:off x="279400" y="2997200"/>
+            <a:off x="4513583" y="1940560"/>
             <a:ext cx="63500" cy="939800"/>
           </a:xfrm>
           <a:prstGeom prst="rect">
@@ -16346,8 +16570,8 @@
         </p:nvSpPr>
         <p:spPr>
           <a:xfrm>
-            <a:off x="406400" y="3073400"/>
-            <a:ext cx="8407400" cy="279400"/>
+            <a:off x="4615183" y="2016760"/>
+            <a:ext cx="4203700" cy="279400"/>
           </a:xfrm>
           <a:prstGeom prst="rect">
             <a:avLst/>
@@ -16386,8 +16610,8 @@
         </p:nvSpPr>
         <p:spPr>
           <a:xfrm>
-            <a:off x="406400" y="3403600"/>
-            <a:ext cx="8407400" cy="482600"/>
+            <a:off x="4577083" y="2286000"/>
+            <a:ext cx="4241800" cy="482600"/>
           </a:xfrm>
           <a:prstGeom prst="rect">
             <a:avLst/>
@@ -16427,8 +16651,8 @@
         </p:nvSpPr>
         <p:spPr>
           <a:xfrm>
-            <a:off x="279400" y="4064000"/>
-            <a:ext cx="8585200" cy="939800"/>
+            <a:off x="4577081" y="3007360"/>
+            <a:ext cx="4292602" cy="939800"/>
           </a:xfrm>
           <a:prstGeom prst="rect">
             <a:avLst/>
@@ -16458,7 +16682,7 @@
         </p:nvSpPr>
         <p:spPr>
           <a:xfrm>
-            <a:off x="279400" y="4064000"/>
+            <a:off x="4508500" y="3007360"/>
             <a:ext cx="63500" cy="939800"/>
           </a:xfrm>
           <a:prstGeom prst="rect">
@@ -16489,8 +16713,8 @@
         </p:nvSpPr>
         <p:spPr>
           <a:xfrm>
-            <a:off x="406400" y="4140200"/>
-            <a:ext cx="8407400" cy="279400"/>
+            <a:off x="4577081" y="3083560"/>
+            <a:ext cx="4241801" cy="279400"/>
           </a:xfrm>
           <a:prstGeom prst="rect">
             <a:avLst/>
@@ -16529,8 +16753,8 @@
         </p:nvSpPr>
         <p:spPr>
           <a:xfrm>
-            <a:off x="406400" y="4470400"/>
-            <a:ext cx="8407400" cy="482600"/>
+            <a:off x="4577083" y="3352800"/>
+            <a:ext cx="4241800" cy="482600"/>
           </a:xfrm>
           <a:prstGeom prst="rect">
             <a:avLst/>
@@ -16560,6 +16784,154 @@
           </a:p>
         </p:txBody>
       </p:sp>
+      <p:pic>
+        <p:nvPicPr>
+          <p:cNvPr id="2054" name="Picture 6">
+            <a:extLst>
+              <a:ext uri="{FF2B5EF4-FFF2-40B4-BE49-F238E27FC236}">
+                <a16:creationId xmlns:a16="http://schemas.microsoft.com/office/drawing/2014/main" id="{D565F8A8-5CAB-B2B4-70C9-46FA50029E0C}"/>
+              </a:ext>
+            </a:extLst>
+          </p:cNvPr>
+          <p:cNvPicPr>
+            <a:picLocks noChangeAspect="1" noChangeArrowheads="1"/>
+          </p:cNvPicPr>
+          <p:nvPr/>
+        </p:nvPicPr>
+        <p:blipFill rotWithShape="1">
+          <a:blip r:embed="rId3">
+            <a:extLst>
+              <a:ext uri="{28A0092B-C50C-407E-A947-70E740481C1C}">
+                <a14:useLocalDpi xmlns:a14="http://schemas.microsoft.com/office/drawing/2010/main" val="0"/>
+              </a:ext>
+            </a:extLst>
+          </a:blip>
+          <a:srcRect r="27717"/>
+          <a:stretch>
+            <a:fillRect/>
+          </a:stretch>
+        </p:blipFill>
+        <p:spPr bwMode="auto">
+          <a:xfrm>
+            <a:off x="368300" y="802640"/>
+            <a:ext cx="3972377" cy="2560320"/>
+          </a:xfrm>
+          <a:prstGeom prst="rect">
+            <a:avLst/>
+          </a:prstGeom>
+          <a:noFill/>
+          <a:extLst>
+            <a:ext uri="{909E8E84-426E-40DD-AFC4-6F175D3DCCD1}">
+              <a14:hiddenFill xmlns:a14="http://schemas.microsoft.com/office/drawing/2010/main">
+                <a:solidFill>
+                  <a:srgbClr val="FFFFFF"/>
+                </a:solidFill>
+              </a14:hiddenFill>
+            </a:ext>
+          </a:extLst>
+        </p:spPr>
+      </p:pic>
+      <p:pic>
+        <p:nvPicPr>
+          <p:cNvPr id="2056" name="Picture 8">
+            <a:extLst>
+              <a:ext uri="{FF2B5EF4-FFF2-40B4-BE49-F238E27FC236}">
+                <a16:creationId xmlns:a16="http://schemas.microsoft.com/office/drawing/2014/main" id="{D2E11A5F-4FFB-E31E-9AD7-20C280A72841}"/>
+              </a:ext>
+            </a:extLst>
+          </p:cNvPr>
+          <p:cNvPicPr>
+            <a:picLocks noChangeAspect="1" noChangeArrowheads="1"/>
+          </p:cNvPicPr>
+          <p:nvPr/>
+        </p:nvPicPr>
+        <p:blipFill rotWithShape="1">
+          <a:blip r:embed="rId3">
+            <a:extLst>
+              <a:ext uri="{28A0092B-C50C-407E-A947-70E740481C1C}">
+                <a14:useLocalDpi xmlns:a14="http://schemas.microsoft.com/office/drawing/2010/main" val="0"/>
+              </a:ext>
+            </a:extLst>
+          </a:blip>
+          <a:srcRect l="57718" t="12121" b="48216"/>
+          <a:stretch>
+            <a:fillRect/>
+          </a:stretch>
+        </p:blipFill>
+        <p:spPr bwMode="auto">
+          <a:xfrm>
+            <a:off x="883920" y="3515851"/>
+            <a:ext cx="2880519" cy="1258858"/>
+          </a:xfrm>
+          <a:prstGeom prst="rect">
+            <a:avLst/>
+          </a:prstGeom>
+          <a:noFill/>
+          <a:extLst>
+            <a:ext uri="{909E8E84-426E-40DD-AFC4-6F175D3DCCD1}">
+              <a14:hiddenFill xmlns:a14="http://schemas.microsoft.com/office/drawing/2010/main">
+                <a:solidFill>
+                  <a:srgbClr val="FFFFFF"/>
+                </a:solidFill>
+              </a14:hiddenFill>
+            </a:ext>
+          </a:extLst>
+        </p:spPr>
+      </p:pic>
+      <p:sp>
+        <p:nvSpPr>
+          <p:cNvPr id="2" name="Rectangle 1">
+            <a:extLst>
+              <a:ext uri="{FF2B5EF4-FFF2-40B4-BE49-F238E27FC236}">
+                <a16:creationId xmlns:a16="http://schemas.microsoft.com/office/drawing/2014/main" id="{A0B58233-7152-4657-6F43-38A70CD591F3}"/>
+              </a:ext>
+            </a:extLst>
+          </p:cNvPr>
+          <p:cNvSpPr/>
+          <p:nvPr/>
+        </p:nvSpPr>
+        <p:spPr>
+          <a:xfrm>
+            <a:off x="3436620" y="949960"/>
+            <a:ext cx="962663" cy="1336040"/>
+          </a:xfrm>
+          <a:prstGeom prst="rect">
+            <a:avLst/>
+          </a:prstGeom>
+          <a:solidFill>
+            <a:schemeClr val="bg1"/>
+          </a:solidFill>
+          <a:ln>
+            <a:solidFill>
+              <a:schemeClr val="bg1"/>
+            </a:solidFill>
+          </a:ln>
+        </p:spPr>
+        <p:style>
+          <a:lnRef idx="2">
+            <a:schemeClr val="accent1">
+              <a:shade val="15000"/>
+            </a:schemeClr>
+          </a:lnRef>
+          <a:fillRef idx="1">
+            <a:schemeClr val="accent1"/>
+          </a:fillRef>
+          <a:effectRef idx="0">
+            <a:schemeClr val="accent1"/>
+          </a:effectRef>
+          <a:fontRef idx="minor">
+            <a:schemeClr val="lt1"/>
+          </a:fontRef>
+        </p:style>
+        <p:txBody>
+          <a:bodyPr rtlCol="0" anchor="ctr"/>
+          <a:lstStyle/>
+          <a:p>
+            <a:pPr algn="ctr"/>
+            <a:endParaRPr lang="en-US"/>
+          </a:p>
+        </p:txBody>
+      </p:sp>
     </p:spTree>
     <p:extLst>
       <p:ext uri="{BB962C8B-B14F-4D97-AF65-F5344CB8AC3E}">
@@ -16570,13 +16942,13 @@
   <p:clrMapOvr>
     <a:masterClrMapping/>
   </p:clrMapOvr>
-  <mc:AlternateContent xmlns:mc="http://schemas.openxmlformats.org/markup-compatibility/2006">
-    <mc:Choice xmlns:p14="http://schemas.microsoft.com/office/powerpoint/2010/main" Requires="p14">
+  <mc:AlternateContent xmlns:mc="http://schemas.openxmlformats.org/markup-compatibility/2006" xmlns:p14="http://schemas.microsoft.com/office/powerpoint/2010/main">
+    <mc:Choice Requires="p14">
       <p:transition p14:dur="250">
         <p:fade/>
       </p:transition>
     </mc:Choice>
-    <mc:Fallback>
+    <mc:Fallback xmlns="">
       <p:transition>
         <p:fade/>
       </p:transition>
@@ -16594,9 +16966,6 @@
                     <p:cTn id="3" fill="hold">
                       <p:stCondLst>
                         <p:cond delay="indefinite"/>
-                        <p:cond evt="onBegin" delay="0">
-                          <p:tn val="2"/>
-                        </p:cond>
                       </p:stCondLst>
                       <p:childTnLst>
                         <p:par>
@@ -16606,7 +16975,7 @@
                             </p:stCondLst>
                             <p:childTnLst>
                               <p:par>
-                                <p:cTn id="5" presetID="10" presetClass="entr" presetSubtype="0" fill="hold" grpId="0" nodeType="withEffect">
+                                <p:cTn id="5" presetID="10" presetClass="entr" presetSubtype="0" fill="hold" grpId="0" nodeType="clickEffect">
                                   <p:stCondLst>
                                     <p:cond delay="0"/>
                                   </p:stCondLst>
@@ -16619,7 +16988,7 @@
                                           </p:stCondLst>
                                         </p:cTn>
                                         <p:tgtEl>
-                                          <p:spTgt spid="20"/>
+                                          <p:spTgt spid="24"/>
                                         </p:tgtEl>
                                         <p:attrNameLst>
                                           <p:attrName>style.visibility</p:attrName>
@@ -16633,7 +17002,7 @@
                                       <p:cBhvr>
                                         <p:cTn id="7" dur="100"/>
                                         <p:tgtEl>
-                                          <p:spTgt spid="20"/>
+                                          <p:spTgt spid="24"/>
                                         </p:tgtEl>
                                       </p:cBhvr>
                                     </p:animEffect>
@@ -16654,7 +17023,7 @@
                                           </p:stCondLst>
                                         </p:cTn>
                                         <p:tgtEl>
-                                          <p:spTgt spid="21"/>
+                                          <p:spTgt spid="25"/>
                                         </p:tgtEl>
                                         <p:attrNameLst>
                                           <p:attrName>style.visibility</p:attrName>
@@ -16668,7 +17037,7 @@
                                       <p:cBhvr>
                                         <p:cTn id="10" dur="100"/>
                                         <p:tgtEl>
-                                          <p:spTgt spid="21"/>
+                                          <p:spTgt spid="25"/>
                                         </p:tgtEl>
                                       </p:cBhvr>
                                     </p:animEffect>
@@ -16689,7 +17058,7 @@
                                           </p:stCondLst>
                                         </p:cTn>
                                         <p:tgtEl>
-                                          <p:spTgt spid="22"/>
+                                          <p:spTgt spid="26"/>
                                         </p:tgtEl>
                                         <p:attrNameLst>
                                           <p:attrName>style.visibility</p:attrName>
@@ -16703,7 +17072,7 @@
                                       <p:cBhvr>
                                         <p:cTn id="13" dur="100"/>
                                         <p:tgtEl>
-                                          <p:spTgt spid="22"/>
+                                          <p:spTgt spid="26"/>
                                         </p:tgtEl>
                                       </p:cBhvr>
                                     </p:animEffect>
@@ -16724,7 +17093,7 @@
                                           </p:stCondLst>
                                         </p:cTn>
                                         <p:tgtEl>
-                                          <p:spTgt spid="23"/>
+                                          <p:spTgt spid="27"/>
                                         </p:tgtEl>
                                         <p:attrNameLst>
                                           <p:attrName>style.visibility</p:attrName>
@@ -16738,7 +17107,7 @@
                                       <p:cBhvr>
                                         <p:cTn id="16" dur="100"/>
                                         <p:tgtEl>
-                                          <p:spTgt spid="23"/>
+                                          <p:spTgt spid="27"/>
                                         </p:tgtEl>
                                       </p:cBhvr>
                                     </p:animEffect>
@@ -16777,7 +17146,7 @@
                                           </p:stCondLst>
                                         </p:cTn>
                                         <p:tgtEl>
-                                          <p:spTgt spid="24"/>
+                                          <p:spTgt spid="28"/>
                                         </p:tgtEl>
                                         <p:attrNameLst>
                                           <p:attrName>style.visibility</p:attrName>
@@ -16791,7 +17160,7 @@
                                       <p:cBhvr>
                                         <p:cTn id="21" dur="100"/>
                                         <p:tgtEl>
-                                          <p:spTgt spid="24"/>
+                                          <p:spTgt spid="28"/>
                                         </p:tgtEl>
                                       </p:cBhvr>
                                     </p:animEffect>
@@ -16812,7 +17181,7 @@
                                           </p:stCondLst>
                                         </p:cTn>
                                         <p:tgtEl>
-                                          <p:spTgt spid="25"/>
+                                          <p:spTgt spid="29"/>
                                         </p:tgtEl>
                                         <p:attrNameLst>
                                           <p:attrName>style.visibility</p:attrName>
@@ -16826,7 +17195,7 @@
                                       <p:cBhvr>
                                         <p:cTn id="24" dur="100"/>
                                         <p:tgtEl>
-                                          <p:spTgt spid="25"/>
+                                          <p:spTgt spid="29"/>
                                         </p:tgtEl>
                                       </p:cBhvr>
                                     </p:animEffect>
@@ -16847,7 +17216,7 @@
                                           </p:stCondLst>
                                         </p:cTn>
                                         <p:tgtEl>
-                                          <p:spTgt spid="26"/>
+                                          <p:spTgt spid="30"/>
                                         </p:tgtEl>
                                         <p:attrNameLst>
                                           <p:attrName>style.visibility</p:attrName>
@@ -16861,7 +17230,7 @@
                                       <p:cBhvr>
                                         <p:cTn id="27" dur="100"/>
                                         <p:tgtEl>
-                                          <p:spTgt spid="26"/>
+                                          <p:spTgt spid="30"/>
                                         </p:tgtEl>
                                       </p:cBhvr>
                                     </p:animEffect>
@@ -16882,7 +17251,7 @@
                                           </p:stCondLst>
                                         </p:cTn>
                                         <p:tgtEl>
-                                          <p:spTgt spid="27"/>
+                                          <p:spTgt spid="31"/>
                                         </p:tgtEl>
                                         <p:attrNameLst>
                                           <p:attrName>style.visibility</p:attrName>
@@ -16896,7 +17265,7 @@
                                       <p:cBhvr>
                                         <p:cTn id="30" dur="100"/>
                                         <p:tgtEl>
-                                          <p:spTgt spid="27"/>
+                                          <p:spTgt spid="31"/>
                                         </p:tgtEl>
                                       </p:cBhvr>
                                     </p:animEffect>
@@ -16935,7 +17304,7 @@
                                           </p:stCondLst>
                                         </p:cTn>
                                         <p:tgtEl>
-                                          <p:spTgt spid="28"/>
+                                          <p:spTgt spid="60"/>
                                         </p:tgtEl>
                                         <p:attrNameLst>
                                           <p:attrName>style.visibility</p:attrName>
@@ -16949,7 +17318,7 @@
                                       <p:cBhvr>
                                         <p:cTn id="35" dur="100"/>
                                         <p:tgtEl>
-                                          <p:spTgt spid="28"/>
+                                          <p:spTgt spid="60"/>
                                         </p:tgtEl>
                                       </p:cBhvr>
                                     </p:animEffect>
@@ -16970,7 +17339,7 @@
                                           </p:stCondLst>
                                         </p:cTn>
                                         <p:tgtEl>
-                                          <p:spTgt spid="29"/>
+                                          <p:spTgt spid="61"/>
                                         </p:tgtEl>
                                         <p:attrNameLst>
                                           <p:attrName>style.visibility</p:attrName>
@@ -16984,7 +17353,7 @@
                                       <p:cBhvr>
                                         <p:cTn id="38" dur="100"/>
                                         <p:tgtEl>
-                                          <p:spTgt spid="29"/>
+                                          <p:spTgt spid="61"/>
                                         </p:tgtEl>
                                       </p:cBhvr>
                                     </p:animEffect>
@@ -17005,7 +17374,7 @@
                                           </p:stCondLst>
                                         </p:cTn>
                                         <p:tgtEl>
-                                          <p:spTgt spid="30"/>
+                                          <p:spTgt spid="62"/>
                                         </p:tgtEl>
                                         <p:attrNameLst>
                                           <p:attrName>style.visibility</p:attrName>
@@ -17019,7 +17388,7 @@
                                       <p:cBhvr>
                                         <p:cTn id="41" dur="100"/>
                                         <p:tgtEl>
-                                          <p:spTgt spid="30"/>
+                                          <p:spTgt spid="62"/>
                                         </p:tgtEl>
                                       </p:cBhvr>
                                     </p:animEffect>
@@ -17040,7 +17409,7 @@
                                           </p:stCondLst>
                                         </p:cTn>
                                         <p:tgtEl>
-                                          <p:spTgt spid="31"/>
+                                          <p:spTgt spid="63"/>
                                         </p:tgtEl>
                                         <p:attrNameLst>
                                           <p:attrName>style.visibility</p:attrName>
@@ -17054,7 +17423,7 @@
                                       <p:cBhvr>
                                         <p:cTn id="44" dur="100"/>
                                         <p:tgtEl>
-                                          <p:spTgt spid="31"/>
+                                          <p:spTgt spid="63"/>
                                         </p:tgtEl>
                                       </p:cBhvr>
                                     </p:animEffect>
@@ -17093,7 +17462,7 @@
                                           </p:stCondLst>
                                         </p:cTn>
                                         <p:tgtEl>
-                                          <p:spTgt spid="60"/>
+                                          <p:spTgt spid="20"/>
                                         </p:tgtEl>
                                         <p:attrNameLst>
                                           <p:attrName>style.visibility</p:attrName>
@@ -17107,7 +17476,7 @@
                                       <p:cBhvr>
                                         <p:cTn id="49" dur="100"/>
                                         <p:tgtEl>
-                                          <p:spTgt spid="60"/>
+                                          <p:spTgt spid="20"/>
                                         </p:tgtEl>
                                       </p:cBhvr>
                                     </p:animEffect>
@@ -17128,7 +17497,7 @@
                                           </p:stCondLst>
                                         </p:cTn>
                                         <p:tgtEl>
-                                          <p:spTgt spid="61"/>
+                                          <p:spTgt spid="21"/>
                                         </p:tgtEl>
                                         <p:attrNameLst>
                                           <p:attrName>style.visibility</p:attrName>
@@ -17142,7 +17511,7 @@
                                       <p:cBhvr>
                                         <p:cTn id="52" dur="100"/>
                                         <p:tgtEl>
-                                          <p:spTgt spid="61"/>
+                                          <p:spTgt spid="21"/>
                                         </p:tgtEl>
                                       </p:cBhvr>
                                     </p:animEffect>
@@ -17163,7 +17532,7 @@
                                           </p:stCondLst>
                                         </p:cTn>
                                         <p:tgtEl>
-                                          <p:spTgt spid="62"/>
+                                          <p:spTgt spid="22"/>
                                         </p:tgtEl>
                                         <p:attrNameLst>
                                           <p:attrName>style.visibility</p:attrName>
@@ -17177,7 +17546,7 @@
                                       <p:cBhvr>
                                         <p:cTn id="55" dur="100"/>
                                         <p:tgtEl>
-                                          <p:spTgt spid="62"/>
+                                          <p:spTgt spid="22"/>
                                         </p:tgtEl>
                                       </p:cBhvr>
                                     </p:animEffect>
@@ -17198,7 +17567,7 @@
                                           </p:stCondLst>
                                         </p:cTn>
                                         <p:tgtEl>
-                                          <p:spTgt spid="63"/>
+                                          <p:spTgt spid="23"/>
                                         </p:tgtEl>
                                         <p:attrNameLst>
                                           <p:attrName>style.visibility</p:attrName>
@@ -17212,7 +17581,7 @@
                                       <p:cBhvr>
                                         <p:cTn id="58" dur="100"/>
                                         <p:tgtEl>
-                                          <p:spTgt spid="63"/>
+                                          <p:spTgt spid="23"/>
                                         </p:tgtEl>
                                       </p:cBhvr>
                                     </p:animEffect>
@@ -18123,13 +18492,13 @@
   <p:clrMapOvr>
     <a:masterClrMapping/>
   </p:clrMapOvr>
-  <mc:AlternateContent xmlns:mc="http://schemas.openxmlformats.org/markup-compatibility/2006">
-    <mc:Choice xmlns:p14="http://schemas.microsoft.com/office/powerpoint/2010/main" Requires="p14">
+  <mc:AlternateContent xmlns:mc="http://schemas.openxmlformats.org/markup-compatibility/2006" xmlns:p14="http://schemas.microsoft.com/office/powerpoint/2010/main">
+    <mc:Choice Requires="p14">
       <p:transition p14:dur="250">
         <p:fade/>
       </p:transition>
     </mc:Choice>
-    <mc:Fallback>
+    <mc:Fallback xmlns="">
       <p:transition>
         <p:fade/>
       </p:transition>
@@ -18925,13 +19294,13 @@
   <p:clrMapOvr>
     <a:masterClrMapping/>
   </p:clrMapOvr>
-  <mc:AlternateContent xmlns:mc="http://schemas.openxmlformats.org/markup-compatibility/2006">
-    <mc:Choice xmlns:p14="http://schemas.microsoft.com/office/powerpoint/2010/main" Requires="p14">
+  <mc:AlternateContent xmlns:mc="http://schemas.openxmlformats.org/markup-compatibility/2006" xmlns:p14="http://schemas.microsoft.com/office/powerpoint/2010/main">
+    <mc:Choice Requires="p14">
       <p:transition p14:dur="250">
         <p:fade/>
       </p:transition>
     </mc:Choice>
-    <mc:Fallback>
+    <mc:Fallback xmlns="">
       <p:transition>
         <p:fade/>
       </p:transition>
@@ -19983,13 +20352,13 @@
   <p:clrMapOvr>
     <a:masterClrMapping/>
   </p:clrMapOvr>
-  <mc:AlternateContent xmlns:mc="http://schemas.openxmlformats.org/markup-compatibility/2006">
-    <mc:Choice xmlns:p14="http://schemas.microsoft.com/office/powerpoint/2010/main" Requires="p14">
+  <mc:AlternateContent xmlns:mc="http://schemas.openxmlformats.org/markup-compatibility/2006" xmlns:p14="http://schemas.microsoft.com/office/powerpoint/2010/main">
+    <mc:Choice Requires="p14">
       <p:transition p14:dur="250">
         <p:fade/>
       </p:transition>
     </mc:Choice>
-    <mc:Fallback>
+    <mc:Fallback xmlns="">
       <p:transition>
         <p:fade/>
       </p:transition>
@@ -21783,13 +22152,13 @@
   <p:clrMapOvr>
     <a:masterClrMapping/>
   </p:clrMapOvr>
-  <mc:AlternateContent xmlns:mc="http://schemas.openxmlformats.org/markup-compatibility/2006">
-    <mc:Choice xmlns:p14="http://schemas.microsoft.com/office/powerpoint/2010/main" Requires="p14">
+  <mc:AlternateContent xmlns:mc="http://schemas.openxmlformats.org/markup-compatibility/2006" xmlns:p14="http://schemas.microsoft.com/office/powerpoint/2010/main">
+    <mc:Choice Requires="p14">
       <p:transition p14:dur="250">
         <p:fade/>
       </p:transition>
     </mc:Choice>
-    <mc:Fallback>
+    <mc:Fallback xmlns="">
       <p:transition>
         <p:fade/>
       </p:transition>
